--- a/Topic_D/Exam_Practice/TD-L10_Speaking_Workshop_Career_Plans_Ambitions_and_Choices.pptx
+++ b/Topic_D/Exam_Practice/TD-L10_Speaking_Workshop_Career_Plans_Ambitions_and_Choices.pptx
@@ -615,7 +615,11 @@
           <a:lstStyle/>
           <a:p>
             <a:r>
-              <a:rPr lang="en-US" dirty="0"/>
+              <a:rPr lang="ar-SA" dirty="0">
+                <a:latin typeface="Amiri" pitchFamily="2" charset="-78"/>
+                <a:ea typeface="Amiri" pitchFamily="2" charset="-78"/>
+                <a:cs typeface="Amiri" pitchFamily="2" charset="-78"/>
+              </a:rPr>
               <a:t>ROLE PLAY C (Develop) — a family discussion.
 SET-UP IN THE BREAKOUT ROOM: A = examiner (reads the left column ONLY — the questions, in order), B = candidate (sees the task column; Core may use the help column), C = observer (ticks the feedback checklist). 1 minute preparation, about 3 minutes speaking, 1 minute feedback, then rotate.
 Task ! is the unexpected question: in the exam the candidate has not seen it — the examiner should read it without warning.
@@ -707,7 +711,11 @@
           <a:lstStyle/>
           <a:p>
             <a:r>
-              <a:rPr lang="en-US" dirty="0"/>
+              <a:rPr lang="ar-SA" dirty="0">
+                <a:latin typeface="Amiri" pitchFamily="2" charset="-78"/>
+                <a:ea typeface="Amiri" pitchFamily="2" charset="-78"/>
+                <a:cs typeface="Amiri" pitchFamily="2" charset="-78"/>
+              </a:rPr>
               <a:t>ROLE PLAY D (Stretch) — a careers podcast.
 SET-UP IN THE BREAKOUT ROOM: A = examiner (reads the left column ONLY — the questions, in order), B = candidate (sees the task column; Core may use the help column), C = observer (ticks the feedback checklist). 1 minute preparation, about 3 minutes speaking, 1 minute feedback, then rotate.
 Task ! is the unexpected question: in the exam the candidate has not seen it — the examiner should read it without warning.
@@ -1243,7 +1251,11 @@
           <a:lstStyle/>
           <a:p>
             <a:r>
-              <a:rPr lang="en-US" dirty="0"/>
+              <a:rPr lang="ar-SA" dirty="0">
+                <a:latin typeface="Amiri" pitchFamily="2" charset="-78"/>
+                <a:ea typeface="Amiri" pitchFamily="2" charset="-78"/>
+                <a:cs typeface="Amiri" pitchFamily="2" charset="-78"/>
+              </a:rPr>
               <a:t>TOPIC CONVERSATION — Core. Examiner asks the questions in order and may add “لِمَاذَا؟ / هَلْ يُمْكِنُ أَنْ تَشْرَحَ أَكْثَرَ؟” to push for more. Candidate aims for one full sentence per question.
 </a:t>
             </a:r>
@@ -1332,7 +1344,11 @@
           <a:lstStyle/>
           <a:p>
             <a:r>
-              <a:rPr lang="en-US" dirty="0"/>
+              <a:rPr lang="ar-SA" dirty="0">
+                <a:latin typeface="Amiri" pitchFamily="2" charset="-78"/>
+                <a:ea typeface="Amiri" pitchFamily="2" charset="-78"/>
+                <a:cs typeface="Amiri" pitchFamily="2" charset="-78"/>
+              </a:rPr>
               <a:t>TOPIC CONVERSATION — Develop. Examiner asks the questions in order and may add “لِمَاذَا؟ / هَلْ يُمْكِنُ أَنْ تَشْرَحَ أَكْثَرَ؟” to push for more. Candidate aims for two or three sentences, with a hope, a plan and a condition.
 </a:t>
             </a:r>
@@ -1421,7 +1437,11 @@
           <a:lstStyle/>
           <a:p>
             <a:r>
-              <a:rPr lang="en-US" dirty="0"/>
+              <a:rPr lang="ar-SA" dirty="0">
+                <a:latin typeface="Amiri" pitchFamily="2" charset="-78"/>
+                <a:ea typeface="Amiri" pitchFamily="2" charset="-78"/>
+                <a:cs typeface="Amiri" pitchFamily="2" charset="-78"/>
+              </a:rPr>
               <a:t>TOPIC CONVERSATION — Stretch. Examiner asks the questions in order and may add “لِمَاذَا؟ / هَلْ يُمْكِنُ أَنْ تَشْرَحَ أَكْثَرَ؟” to push for more. Candidate aims for a developed answer: opinion, balance, concession and a conditional.
 </a:t>
             </a:r>
@@ -1510,7 +1530,11 @@
           <a:lstStyle/>
           <a:p>
             <a:r>
-              <a:rPr lang="en-US" dirty="0"/>
+              <a:rPr lang="ar-SA" dirty="0">
+                <a:latin typeface="Amiri" pitchFamily="2" charset="-78"/>
+                <a:ea typeface="Amiri" pitchFamily="2" charset="-78"/>
+                <a:cs typeface="Amiri" pitchFamily="2" charset="-78"/>
+              </a:rPr>
               <a:t>WELCOME (1 min) — while students join.
 • Greet each student by name as they arrive: السَّلَامُ عَلَيْكُمْ. Take the register (Pastoral Tracker: attendance 0/1).
 • 2-MINUTE CHECK-IN (SEND training): a private chat to any student who seemed unsettled last lesson — “Are you okay today? 👍 / 👎”.
@@ -2224,7 +2248,11 @@
           <a:lstStyle/>
           <a:p>
             <a:r>
-              <a:rPr lang="en-US" dirty="0"/>
+              <a:rPr lang="ar-SA" dirty="0">
+                <a:latin typeface="Amiri" pitchFamily="2" charset="-78"/>
+                <a:ea typeface="Amiri" pitchFamily="2" charset="-78"/>
+                <a:cs typeface="Amiri" pitchFamily="2" charset="-78"/>
+              </a:rPr>
               <a:t>TEACH (3 min). Role play = precise and complete; conversation = develop. Choral repetition of the repair phrases. To a girl: تُعِيدِي.</a:t>
             </a:r>
             <a:endParaRPr lang="en-US" dirty="0"/>
@@ -2312,7 +2340,11 @@
           <a:lstStyle/>
           <a:p>
             <a:r>
-              <a:rPr lang="en-US" dirty="0"/>
+              <a:rPr lang="ar-SA" dirty="0">
+                <a:latin typeface="Amiri" pitchFamily="2" charset="-78"/>
+                <a:ea typeface="Amiri" pitchFamily="2" charset="-78"/>
+                <a:cs typeface="Amiri" pitchFamily="2" charset="-78"/>
+              </a:rPr>
               <a:t>LANGUAGE BANK (2 min) — future: سَأَدْرُسُ / سَوْفَ أَدْرُسُ. Negative future: لَنْ + subjunctive (لَنْ أَتْرُكَ). Hopes: أَطْمَحُ إِلَى أَنْ أُصْبِحَ … · أَتَمَنَّى أَنْ أَعْمَلَ … (أَنْ + subjunctive).</a:t>
             </a:r>
             <a:endParaRPr lang="en-US" dirty="0"/>
@@ -2400,7 +2432,11 @@
           <a:lstStyle/>
           <a:p>
             <a:r>
-              <a:rPr lang="en-US" dirty="0"/>
+              <a:rPr lang="ar-SA" dirty="0">
+                <a:latin typeface="Amiri" pitchFamily="2" charset="-78"/>
+                <a:ea typeface="Amiri" pitchFamily="2" charset="-78"/>
+                <a:cs typeface="Amiri" pitchFamily="2" charset="-78"/>
+              </a:rPr>
               <a:t>LANGUAGE BANK (2 min) — real condition: إِذَا حَصَلْتُ عَلَى دَرَجَاتٍ جَيِّدَةٍ، فَسَأَدْرُسُ … Plan B: إِذَا لَمْ أُقْبَلْ، فَسَأَبْحَثُ عَنْ تَدْرِيبٍ. Unreal: لَوْ كُنْتُ غَنِيًّا، لَأَسَّسْتُ شَرِكَةً.</a:t>
             </a:r>
             <a:endParaRPr lang="en-US" dirty="0"/>
@@ -2576,7 +2612,11 @@
           <a:lstStyle/>
           <a:p>
             <a:r>
-              <a:rPr lang="en-US" dirty="0"/>
+              <a:rPr lang="ar-SA" dirty="0">
+                <a:latin typeface="Amiri" pitchFamily="2" charset="-78"/>
+                <a:ea typeface="Amiri" pitchFamily="2" charset="-78"/>
+                <a:cs typeface="Amiri" pitchFamily="2" charset="-78"/>
+              </a:rPr>
               <a:t>ROLE PLAY A (Core) — a careers chat.
 SET-UP IN THE BREAKOUT ROOM: A = examiner (reads the left column ONLY — the questions, in order), B = candidate (sees the task column; Core may use the help column), C = observer (ticks the feedback checklist). 1 minute preparation, about 3 minutes speaking, 1 minute feedback, then rotate.
 Task ! is the unexpected question: in the exam the candidate has not seen it — the examiner should read it without warning.
@@ -2668,7 +2708,11 @@
           <a:lstStyle/>
           <a:p>
             <a:r>
-              <a:rPr lang="en-US" dirty="0"/>
+              <a:rPr lang="ar-SA" dirty="0">
+                <a:latin typeface="Amiri" pitchFamily="2" charset="-78"/>
+                <a:ea typeface="Amiri" pitchFamily="2" charset="-78"/>
+                <a:cs typeface="Amiri" pitchFamily="2" charset="-78"/>
+              </a:rPr>
               <a:t>ROLE PLAY B (Core+) — a university open day.
 SET-UP IN THE BREAKOUT ROOM: A = examiner (reads the left column ONLY — the questions, in order), B = candidate (sees the task column; Core may use the help column), C = observer (ticks the feedback checklist). 1 minute preparation, about 3 minutes speaking, 1 minute feedback, then rotate.
 Task ! is the unexpected question: in the exam the candidate has not seen it — the examiner should read it without warning.
@@ -3156,6 +3200,7 @@
                   <a:srgbClr val="D4AF37"/>
                 </a:solidFill>
                 <a:latin typeface="Amiri" pitchFamily="2" charset="-78"/>
+                <a:ea typeface="Amiri" pitchFamily="2" charset="-78"/>
                 <a:cs typeface="Amiri" pitchFamily="2" charset="-78"/>
               </a:rPr>
               <a:t>م</a:t>
@@ -3362,6 +3407,7 @@
                   <a:srgbClr val="D4AF37"/>
                 </a:solidFill>
                 <a:latin typeface="Amiri" pitchFamily="2" charset="-78"/>
+                <a:ea typeface="Amiri" pitchFamily="2" charset="-78"/>
                 <a:cs typeface="Amiri" pitchFamily="2" charset="-78"/>
               </a:rPr>
               <a:t>وَرْشَةُ التَّحَدُّثِ — الخُطَطُ وَالطُّمُوحَاتُ</a:t>
@@ -3413,6 +3459,7 @@
                   <a:srgbClr val="C6D2E6"/>
                 </a:solidFill>
                 <a:latin typeface="Amiri" pitchFamily="2" charset="-78"/>
+                <a:ea typeface="Amiri" pitchFamily="2" charset="-78"/>
                 <a:cs typeface="Amiri" pitchFamily="2" charset="-78"/>
               </a:rPr>
               <a:t>سَأَدْرُسُ</a:t>
@@ -3439,6 +3486,7 @@
                   <a:srgbClr val="C6D2E6"/>
                 </a:solidFill>
                 <a:latin typeface="Amiri" pitchFamily="2" charset="-78"/>
+                <a:ea typeface="Amiri" pitchFamily="2" charset="-78"/>
                 <a:cs typeface="Amiri" pitchFamily="2" charset="-78"/>
               </a:rPr>
               <a:t>سَوْفَ أَعْمَلُ</a:t>
@@ -3465,6 +3513,7 @@
                   <a:srgbClr val="C6D2E6"/>
                 </a:solidFill>
                 <a:latin typeface="Amiri" pitchFamily="2" charset="-78"/>
+                <a:ea typeface="Amiri" pitchFamily="2" charset="-78"/>
                 <a:cs typeface="Amiri" pitchFamily="2" charset="-78"/>
               </a:rPr>
               <a:t>لَنْ أَتْرُكَ</a:t>
@@ -3491,6 +3540,7 @@
                   <a:srgbClr val="C6D2E6"/>
                 </a:solidFill>
                 <a:latin typeface="Amiri" pitchFamily="2" charset="-78"/>
+                <a:ea typeface="Amiri" pitchFamily="2" charset="-78"/>
                 <a:cs typeface="Amiri" pitchFamily="2" charset="-78"/>
               </a:rPr>
               <a:t>أَطْمَحُ إِلَى</a:t>
@@ -3517,6 +3567,7 @@
                   <a:srgbClr val="C6D2E6"/>
                 </a:solidFill>
                 <a:latin typeface="Amiri" pitchFamily="2" charset="-78"/>
+                <a:ea typeface="Amiri" pitchFamily="2" charset="-78"/>
                 <a:cs typeface="Amiri" pitchFamily="2" charset="-78"/>
               </a:rPr>
               <a:t>أَتَمَنَّى أَنْ</a:t>
@@ -3543,6 +3594,7 @@
                   <a:srgbClr val="C6D2E6"/>
                 </a:solidFill>
                 <a:latin typeface="Amiri" pitchFamily="2" charset="-78"/>
+                <a:ea typeface="Amiri" pitchFamily="2" charset="-78"/>
                 <a:cs typeface="Amiri" pitchFamily="2" charset="-78"/>
               </a:rPr>
               <a:t>إِذَا لَمْ أُقْبَلْ، فَسَأَعْمَلُ</a:t>
@@ -3975,6 +4027,7 @@
                   <a:srgbClr val="D4AF37"/>
                 </a:solidFill>
                 <a:latin typeface="Amiri" pitchFamily="2" charset="-78"/>
+                <a:ea typeface="Amiri" pitchFamily="2" charset="-78"/>
                 <a:cs typeface="Amiri" pitchFamily="2" charset="-78"/>
               </a:rPr>
               <a:t>م</a:t>
@@ -4295,6 +4348,7 @@
                   <a:srgbClr val="8A6D1E"/>
                 </a:solidFill>
                 <a:latin typeface="Amiri" pitchFamily="2" charset="-78"/>
+                <a:ea typeface="Amiri" pitchFamily="2" charset="-78"/>
                 <a:cs typeface="Amiri" pitchFamily="2" charset="-78"/>
               </a:rPr>
               <a:t>سَنَةُ فَرَاغٍ أَمِ الجَامِعَةُ مُبَاشَرَةً؟</a:t>
@@ -4575,6 +4629,7 @@
                   <a:srgbClr val="1B3B6F"/>
                 </a:solidFill>
                 <a:latin typeface="Amiri" pitchFamily="2" charset="-78"/>
+                <a:ea typeface="Amiri" pitchFamily="2" charset="-78"/>
                 <a:cs typeface="Amiri" pitchFamily="2" charset="-78"/>
               </a:rPr>
               <a:t>أُرِيدُ أَنْ … لِكَيْ …</a:t>
@@ -4651,6 +4706,7 @@
                   <a:srgbClr val="1B3B6F"/>
                 </a:solidFill>
                 <a:latin typeface="Amiri" pitchFamily="2" charset="-78"/>
+                <a:ea typeface="Amiri" pitchFamily="2" charset="-78"/>
                 <a:cs typeface="Amiri" pitchFamily="2" charset="-78"/>
               </a:rPr>
               <a:t>سَمِعْتُ أَنَّكَ تُفَكِّرُ فِي سَنَةِ فَرَاغٍ. لِمَاذَا؟</a:t>
@@ -4754,6 +4810,7 @@
                   <a:srgbClr val="1B3B6F"/>
                 </a:solidFill>
                 <a:latin typeface="Amiri" pitchFamily="2" charset="-78"/>
+                <a:ea typeface="Amiri" pitchFamily="2" charset="-78"/>
                 <a:cs typeface="Amiri" pitchFamily="2" charset="-78"/>
               </a:rPr>
               <a:t>لَنْ … لِأَنَّ …</a:t>
@@ -4830,6 +4887,7 @@
                   <a:srgbClr val="1B3B6F"/>
                 </a:solidFill>
                 <a:latin typeface="Amiri" pitchFamily="2" charset="-78"/>
+                <a:ea typeface="Amiri" pitchFamily="2" charset="-78"/>
                 <a:cs typeface="Amiri" pitchFamily="2" charset="-78"/>
               </a:rPr>
               <a:t>لٰكِنِّي أَخَافُ أَلَّا تَعُودَ إِلَى الدِّرَاسَةِ!</a:t>
@@ -4933,6 +4991,7 @@
                   <a:srgbClr val="1B3B6F"/>
                 </a:solidFill>
                 <a:latin typeface="Amiri" pitchFamily="2" charset="-78"/>
+                <a:ea typeface="Amiri" pitchFamily="2" charset="-78"/>
                 <a:cs typeface="Amiri" pitchFamily="2" charset="-78"/>
               </a:rPr>
               <a:t>ابْنُ عَمِّي … فَعَادَ …</a:t>
@@ -5009,6 +5068,7 @@
                   <a:srgbClr val="1B3B6F"/>
                 </a:solidFill>
                 <a:latin typeface="Amiri" pitchFamily="2" charset="-78"/>
+                <a:ea typeface="Amiri" pitchFamily="2" charset="-78"/>
                 <a:cs typeface="Amiri" pitchFamily="2" charset="-78"/>
               </a:rPr>
               <a:t>وَمَنْ فَعَلَ ذٰلِكَ مِنْ قَبْلُ؟</a:t>
@@ -5112,6 +5172,7 @@
                   <a:srgbClr val="1B3B6F"/>
                 </a:solidFill>
                 <a:latin typeface="Amiri" pitchFamily="2" charset="-78"/>
+                <a:ea typeface="Amiri" pitchFamily="2" charset="-78"/>
                 <a:cs typeface="Amiri" pitchFamily="2" charset="-78"/>
               </a:rPr>
               <a:t>سَأَعْمَلُ … وَسَأَدَّخِرُ …</a:t>
@@ -5188,6 +5249,7 @@
                   <a:srgbClr val="1B3B6F"/>
                 </a:solidFill>
                 <a:latin typeface="Amiri" pitchFamily="2" charset="-78"/>
+                <a:ea typeface="Amiri" pitchFamily="2" charset="-78"/>
                 <a:cs typeface="Amiri" pitchFamily="2" charset="-78"/>
               </a:rPr>
               <a:t>وَالمَالُ؟</a:t>
@@ -5291,6 +5353,7 @@
                   <a:srgbClr val="1B3B6F"/>
                 </a:solidFill>
                 <a:latin typeface="Amiri" pitchFamily="2" charset="-78"/>
+                <a:ea typeface="Amiri" pitchFamily="2" charset="-78"/>
                 <a:cs typeface="Amiri" pitchFamily="2" charset="-78"/>
               </a:rPr>
               <a:t>إِذَا لَمْ يُعْجِبْنِي، فَسَأَعُودُ …</a:t>
@@ -5367,6 +5430,7 @@
                   <a:srgbClr val="1B3B6F"/>
                 </a:solidFill>
                 <a:latin typeface="Amiri" pitchFamily="2" charset="-78"/>
+                <a:ea typeface="Amiri" pitchFamily="2" charset="-78"/>
                 <a:cs typeface="Amiri" pitchFamily="2" charset="-78"/>
               </a:rPr>
               <a:t>وَإِذَا لَمْ يُعْجِبْكَ المَكَانُ؟</a:t>
@@ -5576,6 +5640,7 @@
                   <a:srgbClr val="D4AF37"/>
                 </a:solidFill>
                 <a:latin typeface="Amiri" pitchFamily="2" charset="-78"/>
+                <a:ea typeface="Amiri" pitchFamily="2" charset="-78"/>
                 <a:cs typeface="Amiri" pitchFamily="2" charset="-78"/>
               </a:rPr>
               <a:t>م</a:t>
@@ -5896,6 +5961,7 @@
                   <a:srgbClr val="8A6D1E"/>
                 </a:solidFill>
                 <a:latin typeface="Amiri" pitchFamily="2" charset="-78"/>
+                <a:ea typeface="Amiri" pitchFamily="2" charset="-78"/>
                 <a:cs typeface="Amiri" pitchFamily="2" charset="-78"/>
               </a:rPr>
               <a:t>الشَّغَفُ أَمِ الأَمَانُ؟</a:t>
@@ -6176,6 +6242,7 @@
                   <a:srgbClr val="1B3B6F"/>
                 </a:solidFill>
                 <a:latin typeface="Amiri" pitchFamily="2" charset="-78"/>
+                <a:ea typeface="Amiri" pitchFamily="2" charset="-78"/>
                 <a:cs typeface="Amiri" pitchFamily="2" charset="-78"/>
               </a:rPr>
               <a:t>أَطْمَحُ إِلَى أَنْ … لِأَنَّ …</a:t>
@@ -6252,6 +6319,7 @@
                   <a:srgbClr val="1B3B6F"/>
                 </a:solidFill>
                 <a:latin typeface="Amiri" pitchFamily="2" charset="-78"/>
+                <a:ea typeface="Amiri" pitchFamily="2" charset="-78"/>
                 <a:cs typeface="Amiri" pitchFamily="2" charset="-78"/>
               </a:rPr>
               <a:t>مَا حُلْمُكَ المِهْنِيُّ؟</a:t>
@@ -6355,6 +6423,7 @@
                   <a:srgbClr val="1B3B6F"/>
                 </a:solidFill>
                 <a:latin typeface="Amiri" pitchFamily="2" charset="-78"/>
+                <a:ea typeface="Amiri" pitchFamily="2" charset="-78"/>
                 <a:cs typeface="Amiri" pitchFamily="2" charset="-78"/>
               </a:rPr>
               <a:t>صَحِيحٌ أَنَّ … غَيْرَ أَنِّي …</a:t>
@@ -6431,6 +6500,7 @@
                   <a:srgbClr val="1B3B6F"/>
                 </a:solidFill>
                 <a:latin typeface="Amiri" pitchFamily="2" charset="-78"/>
+                <a:ea typeface="Amiri" pitchFamily="2" charset="-78"/>
                 <a:cs typeface="Amiri" pitchFamily="2" charset="-78"/>
               </a:rPr>
               <a:t>لٰكِنَّ هٰذَا المَجَالَ صَعْبٌ وَغَيْرُ مَضْمُونٍ.</a:t>
@@ -6534,6 +6604,7 @@
                   <a:srgbClr val="1B3B6F"/>
                 </a:solidFill>
                 <a:latin typeface="Amiri" pitchFamily="2" charset="-78"/>
+                <a:ea typeface="Amiri" pitchFamily="2" charset="-78"/>
                 <a:cs typeface="Amiri" pitchFamily="2" charset="-78"/>
               </a:rPr>
               <a:t>نَعَمْ، صَنَعْتُ … فَفَازَ …</a:t>
@@ -6610,6 +6681,7 @@
                   <a:srgbClr val="1B3B6F"/>
                 </a:solidFill>
                 <a:latin typeface="Amiri" pitchFamily="2" charset="-78"/>
+                <a:ea typeface="Amiri" pitchFamily="2" charset="-78"/>
                 <a:cs typeface="Amiri" pitchFamily="2" charset="-78"/>
               </a:rPr>
               <a:t>هَلْ بَدَأْتَ فِعْلًا؟</a:t>
@@ -6713,6 +6785,7 @@
                   <a:srgbClr val="1B3B6F"/>
                 </a:solidFill>
                 <a:latin typeface="Amiri" pitchFamily="2" charset="-78"/>
+                <a:ea typeface="Amiri" pitchFamily="2" charset="-78"/>
                 <a:cs typeface="Amiri" pitchFamily="2" charset="-78"/>
               </a:rPr>
               <a:t>مِنْ نَاحِيَةٍ … وَمِنْ نَاحِيَةٍ أُخْرَى … لِذٰلِكَ …</a:t>
@@ -6789,6 +6862,7 @@
                   <a:srgbClr val="1B3B6F"/>
                 </a:solidFill>
                 <a:latin typeface="Amiri" pitchFamily="2" charset="-78"/>
+                <a:ea typeface="Amiri" pitchFamily="2" charset="-78"/>
                 <a:cs typeface="Amiri" pitchFamily="2" charset="-78"/>
               </a:rPr>
               <a:t>مَاذَا تَقُولُ لِشَابٍّ مُتَرَدِّدٍ بَيْنَ الشَّغَفِ وَالأَمَانِ؟</a:t>
@@ -6892,6 +6966,7 @@
                   <a:srgbClr val="1B3B6F"/>
                 </a:solidFill>
                 <a:latin typeface="Amiri" pitchFamily="2" charset="-78"/>
+                <a:ea typeface="Amiri" pitchFamily="2" charset="-78"/>
                 <a:cs typeface="Amiri" pitchFamily="2" charset="-78"/>
               </a:rPr>
               <a:t>لَوْ لَمْ أَنْجَحْ، لَحَزِنْتُ … لٰكِنِّي …</a:t>
@@ -6968,6 +7043,7 @@
                   <a:srgbClr val="1B3B6F"/>
                 </a:solidFill>
                 <a:latin typeface="Amiri" pitchFamily="2" charset="-78"/>
+                <a:ea typeface="Amiri" pitchFamily="2" charset="-78"/>
                 <a:cs typeface="Amiri" pitchFamily="2" charset="-78"/>
               </a:rPr>
               <a:t>لَوْ لَمْ تَنْجَحْ كَمُخْرِجٍ، هَلْ سَتَنْدَمُ؟</a:t>
@@ -7177,6 +7253,7 @@
                   <a:srgbClr val="D4AF37"/>
                 </a:solidFill>
                 <a:latin typeface="Amiri" pitchFamily="2" charset="-78"/>
+                <a:ea typeface="Amiri" pitchFamily="2" charset="-78"/>
                 <a:cs typeface="Amiri" pitchFamily="2" charset="-78"/>
               </a:rPr>
               <a:t>م</a:t>
@@ -7497,6 +7574,7 @@
                   <a:srgbClr val="8A6D1E"/>
                 </a:solidFill>
                 <a:latin typeface="Amiri" pitchFamily="2" charset="-78"/>
+                <a:ea typeface="Amiri" pitchFamily="2" charset="-78"/>
                 <a:cs typeface="Amiri" pitchFamily="2" charset="-78"/>
               </a:rPr>
               <a:t>وَرَقَةُ المُلَاحِظِ</a:t>
@@ -8967,6 +9045,7 @@
                   <a:srgbClr val="D4AF37"/>
                 </a:solidFill>
                 <a:latin typeface="Amiri" pitchFamily="2" charset="-78"/>
+                <a:ea typeface="Amiri" pitchFamily="2" charset="-78"/>
                 <a:cs typeface="Amiri" pitchFamily="2" charset="-78"/>
               </a:rPr>
               <a:t>م</a:t>
@@ -9287,6 +9366,7 @@
                   <a:srgbClr val="8A6D1E"/>
                 </a:solidFill>
                 <a:latin typeface="Amiri" pitchFamily="2" charset="-78"/>
+                <a:ea typeface="Amiri" pitchFamily="2" charset="-78"/>
                 <a:cs typeface="Amiri" pitchFamily="2" charset="-78"/>
               </a:rPr>
               <a:t>نَمُوذَجُ الإِجَابَةِ</a:t>
@@ -9529,6 +9609,7 @@
                   <a:srgbClr val="1B3B6F"/>
                 </a:solidFill>
                 <a:latin typeface="Amiri" pitchFamily="2" charset="-78"/>
+                <a:ea typeface="Amiri" pitchFamily="2" charset="-78"/>
                 <a:cs typeface="Amiri" pitchFamily="2" charset="-78"/>
               </a:rPr>
               <a:t>سَأَدْرُسُ فِي كُلِّيَّةٍ قَرِيبَةٍ.</a:t>
@@ -9605,6 +9686,7 @@
                   <a:srgbClr val="1B3B6F"/>
                 </a:solidFill>
                 <a:latin typeface="Amiri" pitchFamily="2" charset="-78"/>
+                <a:ea typeface="Amiri" pitchFamily="2" charset="-78"/>
                 <a:cs typeface="Amiri" pitchFamily="2" charset="-78"/>
               </a:rPr>
               <a:t>مَاذَا سَتَفْعَلُ بَعْدَ الامْتِحَانَاتِ؟</a:t>
@@ -9708,6 +9790,7 @@
                   <a:srgbClr val="1B3B6F"/>
                 </a:solidFill>
                 <a:latin typeface="Amiri" pitchFamily="2" charset="-78"/>
+                <a:ea typeface="Amiri" pitchFamily="2" charset="-78"/>
                 <a:cs typeface="Amiri" pitchFamily="2" charset="-78"/>
               </a:rPr>
               <a:t>سَأَدْرُسُ الرِّيَاضِيَّاتِ وَالفِيزْيَاءَ.</a:t>
@@ -9784,6 +9867,7 @@
                   <a:srgbClr val="1B3B6F"/>
                 </a:solidFill>
                 <a:latin typeface="Amiri" pitchFamily="2" charset="-78"/>
+                <a:ea typeface="Amiri" pitchFamily="2" charset="-78"/>
                 <a:cs typeface="Amiri" pitchFamily="2" charset="-78"/>
               </a:rPr>
               <a:t>أَيَّ مَوَادَّ؟</a:t>
@@ -9887,6 +9971,7 @@
                   <a:srgbClr val="1B3B6F"/>
                 </a:solidFill>
                 <a:latin typeface="Amiri" pitchFamily="2" charset="-78"/>
+                <a:ea typeface="Amiri" pitchFamily="2" charset="-78"/>
                 <a:cs typeface="Amiri" pitchFamily="2" charset="-78"/>
               </a:rPr>
               <a:t>أَتَمَنَّى أَنْ أُصْبِحَ مُهَنْدِسًا.</a:t>
@@ -9963,6 +10048,7 @@
                   <a:srgbClr val="1B3B6F"/>
                 </a:solidFill>
                 <a:latin typeface="Amiri" pitchFamily="2" charset="-78"/>
+                <a:ea typeface="Amiri" pitchFamily="2" charset="-78"/>
                 <a:cs typeface="Amiri" pitchFamily="2" charset="-78"/>
               </a:rPr>
               <a:t>وَمَاذَا تُرِيدُ أَنْ تَعْمَلَ فِي المُسْتَقْبَلِ؟</a:t>
@@ -10066,6 +10152,7 @@
                   <a:srgbClr val="1B3B6F"/>
                 </a:solidFill>
                 <a:latin typeface="Amiri" pitchFamily="2" charset="-78"/>
+                <a:ea typeface="Amiri" pitchFamily="2" charset="-78"/>
                 <a:cs typeface="Amiri" pitchFamily="2" charset="-78"/>
               </a:rPr>
               <a:t>أَيْنَ سَيَدْرُسُ؟</a:t>
@@ -10142,6 +10229,7 @@
                   <a:srgbClr val="1B3B6F"/>
                 </a:solidFill>
                 <a:latin typeface="Amiri" pitchFamily="2" charset="-78"/>
+                <a:ea typeface="Amiri" pitchFamily="2" charset="-78"/>
                 <a:cs typeface="Amiri" pitchFamily="2" charset="-78"/>
               </a:rPr>
               <a:t>ابْنِي يُرِيدُ أَنْ يَكُونَ طَيَّارًا.</a:t>
@@ -10245,6 +10333,7 @@
                   <a:srgbClr val="1B3B6F"/>
                 </a:solidFill>
                 <a:latin typeface="Amiri" pitchFamily="2" charset="-78"/>
+                <a:ea typeface="Amiri" pitchFamily="2" charset="-78"/>
                 <a:cs typeface="Amiri" pitchFamily="2" charset="-78"/>
               </a:rPr>
               <a:t>لَا، سَأَنْتَقِلُ إِلَى لَنْدَنَ لِلْجَامِعَةِ.</a:t>
@@ -10321,6 +10410,7 @@
                   <a:srgbClr val="1B3B6F"/>
                 </a:solidFill>
                 <a:latin typeface="Amiri" pitchFamily="2" charset="-78"/>
+                <a:ea typeface="Amiri" pitchFamily="2" charset="-78"/>
                 <a:cs typeface="Amiri" pitchFamily="2" charset="-78"/>
               </a:rPr>
               <a:t>هَلْ سَتَبْقَى فِي مَدِينَتِكَ؟</a:t>
@@ -10530,6 +10620,7 @@
                   <a:srgbClr val="D4AF37"/>
                 </a:solidFill>
                 <a:latin typeface="Amiri" pitchFamily="2" charset="-78"/>
+                <a:ea typeface="Amiri" pitchFamily="2" charset="-78"/>
                 <a:cs typeface="Amiri" pitchFamily="2" charset="-78"/>
               </a:rPr>
               <a:t>م</a:t>
@@ -10850,6 +10941,7 @@
                   <a:srgbClr val="8A6D1E"/>
                 </a:solidFill>
                 <a:latin typeface="Amiri" pitchFamily="2" charset="-78"/>
+                <a:ea typeface="Amiri" pitchFamily="2" charset="-78"/>
                 <a:cs typeface="Amiri" pitchFamily="2" charset="-78"/>
               </a:rPr>
               <a:t>نَمُوذَجُ الإِجَابَةِ</a:t>
@@ -11092,6 +11184,7 @@
                   <a:srgbClr val="1B3B6F"/>
                 </a:solidFill>
                 <a:latin typeface="Amiri" pitchFamily="2" charset="-78"/>
+                <a:ea typeface="Amiri" pitchFamily="2" charset="-78"/>
                 <a:cs typeface="Amiri" pitchFamily="2" charset="-78"/>
               </a:rPr>
               <a:t>أُرِيدُ أَنْ أَتَخَصَّصَ فِي عِلْمِ النَّفْسِ.</a:t>
@@ -11168,6 +11261,7 @@
                   <a:srgbClr val="1B3B6F"/>
                 </a:solidFill>
                 <a:latin typeface="Amiri" pitchFamily="2" charset="-78"/>
+                <a:ea typeface="Amiri" pitchFamily="2" charset="-78"/>
                 <a:cs typeface="Amiri" pitchFamily="2" charset="-78"/>
               </a:rPr>
               <a:t>أَهْلًا! مَا التَّخَصُّصُ الَّذِي يُهِمُّكَ؟</a:t>
@@ -11271,6 +11365,7 @@
                   <a:srgbClr val="1B3B6F"/>
                 </a:solidFill>
                 <a:latin typeface="Amiri" pitchFamily="2" charset="-78"/>
+                <a:ea typeface="Amiri" pitchFamily="2" charset="-78"/>
                 <a:cs typeface="Amiri" pitchFamily="2" charset="-78"/>
               </a:rPr>
               <a:t>لِأَنِّي أَطْمَحُ إِلَى أَنْ أُسَاعِدَ الشَّبَابَ الَّذِينَ يُعَانُونَ مِنَ القَلَقِ.</a:t>
@@ -11347,6 +11442,7 @@
                   <a:srgbClr val="1B3B6F"/>
                 </a:solidFill>
                 <a:latin typeface="Amiri" pitchFamily="2" charset="-78"/>
+                <a:ea typeface="Amiri" pitchFamily="2" charset="-78"/>
                 <a:cs typeface="Amiri" pitchFamily="2" charset="-78"/>
               </a:rPr>
               <a:t>لِمَاذَا؟</a:t>
@@ -11450,6 +11546,7 @@
                   <a:srgbClr val="1B3B6F"/>
                 </a:solidFill>
                 <a:latin typeface="Amiri" pitchFamily="2" charset="-78"/>
+                <a:ea typeface="Amiri" pitchFamily="2" charset="-78"/>
                 <a:cs typeface="Amiri" pitchFamily="2" charset="-78"/>
               </a:rPr>
               <a:t>هَلْ يُمْكِنُ أَنْ أَتَدَرَّبَ فِي مُسْتَشْفًى أَوْ مَدْرَسَةٍ أَثْنَاءَ الدِّرَاسَةِ؟</a:t>
@@ -11526,6 +11623,7 @@
                   <a:srgbClr val="1B3B6F"/>
                 </a:solidFill>
                 <a:latin typeface="Amiri" pitchFamily="2" charset="-78"/>
+                <a:ea typeface="Amiri" pitchFamily="2" charset="-78"/>
                 <a:cs typeface="Amiri" pitchFamily="2" charset="-78"/>
               </a:rPr>
               <a:t>الدِّرَاسَةُ ثَلَاثُ سَنَوَاتٍ.</a:t>
@@ -11629,6 +11727,7 @@
                   <a:srgbClr val="1B3B6F"/>
                 </a:solidFill>
                 <a:latin typeface="Amiri" pitchFamily="2" charset="-78"/>
+                <a:ea typeface="Amiri" pitchFamily="2" charset="-78"/>
                 <a:cs typeface="Amiri" pitchFamily="2" charset="-78"/>
               </a:rPr>
               <a:t>أَتَوَقَّعُ دَرَجَاتٍ جَيِّدَةً، وَإِذَا حَصَلْتُ عَلَيْهَا، فَسَأَتَقَدَّمُ إِلَى جَامِعَتِكُمْ أَوَّلًا.</a:t>
@@ -11708,6 +11807,7 @@
                   <a:srgbClr val="1B3B6F"/>
                 </a:solidFill>
                 <a:latin typeface="Amiri" pitchFamily="2" charset="-78"/>
+                <a:ea typeface="Amiri" pitchFamily="2" charset="-78"/>
                 <a:cs typeface="Amiri" pitchFamily="2" charset="-78"/>
               </a:rPr>
               <a:t>نَعَمْ، فِي السَّنَةِ الثَّانِيَةِ. وَمَا الدَّرَجَاتُ الَّتِي تَتَوَقَّعُهَا؟</a:t>
@@ -11811,6 +11911,7 @@
                   <a:srgbClr val="1B3B6F"/>
                 </a:solidFill>
                 <a:latin typeface="Amiri" pitchFamily="2" charset="-78"/>
+                <a:ea typeface="Amiri" pitchFamily="2" charset="-78"/>
                 <a:cs typeface="Amiri" pitchFamily="2" charset="-78"/>
               </a:rPr>
               <a:t>إِذَا لَمْ أُقْبَلْ، فَسَأَدْرُسُ فِي جَامِعَةٍ أُخْرَى، أَوْ سَأَعْمَلُ سَنَةً ثُمَّ أَتَقَدَّمُ مِنْ جَدِيدٍ.</a:t>
@@ -11887,6 +11988,7 @@
                   <a:srgbClr val="1B3B6F"/>
                 </a:solidFill>
                 <a:latin typeface="Amiri" pitchFamily="2" charset="-78"/>
+                <a:ea typeface="Amiri" pitchFamily="2" charset="-78"/>
                 <a:cs typeface="Amiri" pitchFamily="2" charset="-78"/>
               </a:rPr>
               <a:t>وَإِذَا لَمْ تُقْبَلْ؟</a:t>
@@ -12096,6 +12198,7 @@
                   <a:srgbClr val="D4AF37"/>
                 </a:solidFill>
                 <a:latin typeface="Amiri" pitchFamily="2" charset="-78"/>
+                <a:ea typeface="Amiri" pitchFamily="2" charset="-78"/>
                 <a:cs typeface="Amiri" pitchFamily="2" charset="-78"/>
               </a:rPr>
               <a:t>م</a:t>
@@ -12416,6 +12519,7 @@
                   <a:srgbClr val="8A6D1E"/>
                 </a:solidFill>
                 <a:latin typeface="Amiri" pitchFamily="2" charset="-78"/>
+                <a:ea typeface="Amiri" pitchFamily="2" charset="-78"/>
                 <a:cs typeface="Amiri" pitchFamily="2" charset="-78"/>
               </a:rPr>
               <a:t>نَمُوذَجُ الإِجَابَةِ</a:t>
@@ -12658,6 +12762,7 @@
                   <a:srgbClr val="1B3B6F"/>
                 </a:solidFill>
                 <a:latin typeface="Amiri" pitchFamily="2" charset="-78"/>
+                <a:ea typeface="Amiri" pitchFamily="2" charset="-78"/>
                 <a:cs typeface="Amiri" pitchFamily="2" charset="-78"/>
               </a:rPr>
               <a:t>أُرِيدُ أَنْ أَتَطَوَّعَ فِي مَدْرَسَةٍ فِي المَغْرِبِ، لِكَيْ أُحَسِّنَ لُغَتِي العَرَبِيَّةَ وَأَكْتَسِبَ خِبْرَةً فِي التَّعْلِيمِ.</a:t>
@@ -12734,6 +12839,7 @@
                   <a:srgbClr val="1B3B6F"/>
                 </a:solidFill>
                 <a:latin typeface="Amiri" pitchFamily="2" charset="-78"/>
+                <a:ea typeface="Amiri" pitchFamily="2" charset="-78"/>
                 <a:cs typeface="Amiri" pitchFamily="2" charset="-78"/>
               </a:rPr>
               <a:t>سَمِعْتُ أَنَّكَ تُفَكِّرُ فِي سَنَةِ فَرَاغٍ. لِمَاذَا؟</a:t>
@@ -12837,6 +12943,7 @@
                   <a:srgbClr val="1B3B6F"/>
                 </a:solidFill>
                 <a:latin typeface="Amiri" pitchFamily="2" charset="-78"/>
+                <a:ea typeface="Amiri" pitchFamily="2" charset="-78"/>
                 <a:cs typeface="Amiri" pitchFamily="2" charset="-78"/>
               </a:rPr>
               <a:t>لَنْ أَتْرُكَ الدِّرَاسَةَ أَبَدًا، لِأَنِّي قُبِلْتُ فِي الجَامِعَةِ، وَأَجَّلْتُ البِدَايَةَ سَنَةً فَقَطْ.</a:t>
@@ -12913,6 +13020,7 @@
                   <a:srgbClr val="1B3B6F"/>
                 </a:solidFill>
                 <a:latin typeface="Amiri" pitchFamily="2" charset="-78"/>
+                <a:ea typeface="Amiri" pitchFamily="2" charset="-78"/>
                 <a:cs typeface="Amiri" pitchFamily="2" charset="-78"/>
               </a:rPr>
               <a:t>لٰكِنِّي أَخَافُ أَلَّا تَعُودَ إِلَى الدِّرَاسَةِ!</a:t>
@@ -13016,6 +13124,7 @@
                   <a:srgbClr val="1B3B6F"/>
                 </a:solidFill>
                 <a:latin typeface="Amiri" pitchFamily="2" charset="-78"/>
+                <a:ea typeface="Amiri" pitchFamily="2" charset="-78"/>
                 <a:cs typeface="Amiri" pitchFamily="2" charset="-78"/>
               </a:rPr>
               <a:t>ابْنُ عَمِّي قَضَى سَنَةً فِي كِينْيَا يَبْنِي مَدَارِسَ، فَعَادَ أَكْثَرَ نُضْجًا، وَعَرَفَ بِالضَّبْطِ مَاذَا يُرِيدُ أَنْ يَدْرُسَ.</a:t>
@@ -13092,6 +13201,7 @@
                   <a:srgbClr val="1B3B6F"/>
                 </a:solidFill>
                 <a:latin typeface="Amiri" pitchFamily="2" charset="-78"/>
+                <a:ea typeface="Amiri" pitchFamily="2" charset="-78"/>
                 <a:cs typeface="Amiri" pitchFamily="2" charset="-78"/>
               </a:rPr>
               <a:t>وَمَنْ فَعَلَ ذٰلِكَ مِنْ قَبْلُ؟</a:t>
@@ -13195,6 +13305,7 @@
                   <a:srgbClr val="1B3B6F"/>
                 </a:solidFill>
                 <a:latin typeface="Amiri" pitchFamily="2" charset="-78"/>
+                <a:ea typeface="Amiri" pitchFamily="2" charset="-78"/>
                 <a:cs typeface="Amiri" pitchFamily="2" charset="-78"/>
               </a:rPr>
               <a:t>سَأَعْمَلُ فِي الصَّيْفِ، وَسَأَدَّخِرُ نِصْفَ رَاتِبِي، كَمَا أَنَّ المُنَظَّمَةَ تُوَفِّرُ السَّكَنَ مَجَّانًا.</a:t>
@@ -13271,6 +13382,7 @@
                   <a:srgbClr val="1B3B6F"/>
                 </a:solidFill>
                 <a:latin typeface="Amiri" pitchFamily="2" charset="-78"/>
+                <a:ea typeface="Amiri" pitchFamily="2" charset="-78"/>
                 <a:cs typeface="Amiri" pitchFamily="2" charset="-78"/>
               </a:rPr>
               <a:t>وَالمَالُ؟</a:t>
@@ -13374,6 +13486,7 @@
                   <a:srgbClr val="1B3B6F"/>
                 </a:solidFill>
                 <a:latin typeface="Amiri" pitchFamily="2" charset="-78"/>
+                <a:ea typeface="Amiri" pitchFamily="2" charset="-78"/>
                 <a:cs typeface="Amiri" pitchFamily="2" charset="-78"/>
               </a:rPr>
               <a:t>إِذَا لَمْ يُعْجِبْنِي، فَسَأَعُودُ بَعْدَ ثَلَاثَةِ أَشْهُرٍ، وَأَعْمَلُ هُنَا حَتَّى تَبْدَأَ الجَامِعَةُ.</a:t>
@@ -13450,6 +13563,7 @@
                   <a:srgbClr val="1B3B6F"/>
                 </a:solidFill>
                 <a:latin typeface="Amiri" pitchFamily="2" charset="-78"/>
+                <a:ea typeface="Amiri" pitchFamily="2" charset="-78"/>
                 <a:cs typeface="Amiri" pitchFamily="2" charset="-78"/>
               </a:rPr>
               <a:t>وَإِذَا لَمْ يُعْجِبْكَ المَكَانُ؟</a:t>
@@ -13659,6 +13773,7 @@
                   <a:srgbClr val="D4AF37"/>
                 </a:solidFill>
                 <a:latin typeface="Amiri" pitchFamily="2" charset="-78"/>
+                <a:ea typeface="Amiri" pitchFamily="2" charset="-78"/>
                 <a:cs typeface="Amiri" pitchFamily="2" charset="-78"/>
               </a:rPr>
               <a:t>م</a:t>
@@ -13979,6 +14094,7 @@
                   <a:srgbClr val="8A6D1E"/>
                 </a:solidFill>
                 <a:latin typeface="Amiri" pitchFamily="2" charset="-78"/>
+                <a:ea typeface="Amiri" pitchFamily="2" charset="-78"/>
                 <a:cs typeface="Amiri" pitchFamily="2" charset="-78"/>
               </a:rPr>
               <a:t>نَمُوذَجُ الإِجَابَةِ</a:t>
@@ -14221,6 +14337,7 @@
                   <a:srgbClr val="1B3B6F"/>
                 </a:solidFill>
                 <a:latin typeface="Amiri" pitchFamily="2" charset="-78"/>
+                <a:ea typeface="Amiri" pitchFamily="2" charset="-78"/>
                 <a:cs typeface="Amiri" pitchFamily="2" charset="-78"/>
               </a:rPr>
               <a:t>أَطْمَحُ إِلَى أَنْ أُصْبِحَ مُخْرِجًا سِينِمَائِيًّا، لِأَنَّ الأَفْلَامَ تَسْتَطِيعُ أَنْ تُغَيِّرَ نَظْرَةَ المَلَايِينِ إِلَى العَالَمِ.</a:t>
@@ -14297,6 +14414,7 @@
                   <a:srgbClr val="1B3B6F"/>
                 </a:solidFill>
                 <a:latin typeface="Amiri" pitchFamily="2" charset="-78"/>
+                <a:ea typeface="Amiri" pitchFamily="2" charset="-78"/>
                 <a:cs typeface="Amiri" pitchFamily="2" charset="-78"/>
               </a:rPr>
               <a:t>مَا حُلْمُكَ المِهْنِيُّ؟</a:t>
@@ -14400,6 +14518,7 @@
                   <a:srgbClr val="1B3B6F"/>
                 </a:solidFill>
                 <a:latin typeface="Amiri" pitchFamily="2" charset="-78"/>
+                <a:ea typeface="Amiri" pitchFamily="2" charset="-78"/>
                 <a:cs typeface="Amiri" pitchFamily="2" charset="-78"/>
               </a:rPr>
               <a:t>صَحِيحٌ أَنَّهُ غَيْرُ مَضْمُونٍ، غَيْرَ أَنِّي سَأَدْرُسُ الإِعْلَامَ، وَهُوَ تَخَصُّصٌ يَفْتَحُ أَبْوَابًا كَثِيرَةً، وَسَأَصْنَعُ أَفْلَامًا قَصِيرَةً فِي وَقْتِ فَرَاغِي.</a:t>
@@ -14476,6 +14595,7 @@
                   <a:srgbClr val="1B3B6F"/>
                 </a:solidFill>
                 <a:latin typeface="Amiri" pitchFamily="2" charset="-78"/>
+                <a:ea typeface="Amiri" pitchFamily="2" charset="-78"/>
                 <a:cs typeface="Amiri" pitchFamily="2" charset="-78"/>
               </a:rPr>
               <a:t>لٰكِنَّ هٰذَا المَجَالَ صَعْبٌ وَغَيْرُ مَضْمُونٍ.</a:t>
@@ -14579,6 +14699,7 @@
                   <a:srgbClr val="1B3B6F"/>
                 </a:solidFill>
                 <a:latin typeface="Amiri" pitchFamily="2" charset="-78"/>
+                <a:ea typeface="Amiri" pitchFamily="2" charset="-78"/>
                 <a:cs typeface="Amiri" pitchFamily="2" charset="-78"/>
               </a:rPr>
               <a:t>نَعَمْ، صَنَعْتُ فِيلْمًا قَصِيرًا عَنْ جَدَّتِي وَهِجْرَتِهَا، فَفَازَ بِالجَائِزَةِ الثَّانِيَةِ فِي مُسَابَقَةٍ لِلشَّبَابِ.</a:t>
@@ -14655,6 +14776,7 @@
                   <a:srgbClr val="1B3B6F"/>
                 </a:solidFill>
                 <a:latin typeface="Amiri" pitchFamily="2" charset="-78"/>
+                <a:ea typeface="Amiri" pitchFamily="2" charset="-78"/>
                 <a:cs typeface="Amiri" pitchFamily="2" charset="-78"/>
               </a:rPr>
               <a:t>هَلْ بَدَأْتَ فِعْلًا؟</a:t>
@@ -14758,6 +14880,7 @@
                   <a:srgbClr val="1B3B6F"/>
                 </a:solidFill>
                 <a:latin typeface="Amiri" pitchFamily="2" charset="-78"/>
+                <a:ea typeface="Amiri" pitchFamily="2" charset="-78"/>
                 <a:cs typeface="Amiri" pitchFamily="2" charset="-78"/>
               </a:rPr>
               <a:t>مِنْ نَاحِيَةٍ، لَا تَتْرُكْ حُلْمَكَ بِسُرْعَةٍ، وَمِنْ نَاحِيَةٍ أُخْرَى، ابْنِ لِنَفْسِكَ مَهَارَاتٍ تَحْمِيكَ؛ لِذٰلِكَ اجْمَعْ بَيْنَهُمَا مَا اسْتَطَعْتَ.</a:t>
@@ -14834,6 +14957,7 @@
                   <a:srgbClr val="1B3B6F"/>
                 </a:solidFill>
                 <a:latin typeface="Amiri" pitchFamily="2" charset="-78"/>
+                <a:ea typeface="Amiri" pitchFamily="2" charset="-78"/>
                 <a:cs typeface="Amiri" pitchFamily="2" charset="-78"/>
               </a:rPr>
               <a:t>مَاذَا تَقُولُ لِشَابٍّ مُتَرَدِّدٍ بَيْنَ الشَّغَفِ وَالأَمَانِ؟</a:t>
@@ -14937,6 +15061,7 @@
                   <a:srgbClr val="1B3B6F"/>
                 </a:solidFill>
                 <a:latin typeface="Amiri" pitchFamily="2" charset="-78"/>
+                <a:ea typeface="Amiri" pitchFamily="2" charset="-78"/>
                 <a:cs typeface="Amiri" pitchFamily="2" charset="-78"/>
               </a:rPr>
               <a:t>لَوْ لَمْ أَنْجَحْ، لَحَزِنْتُ قَلِيلًا، لٰكِنِّي لَنْ أَنْدَمَ أَبَدًا، لِأَنَّ النَّدَمَ الحَقِيقِيَّ أَلَّا تُحَاوِلَ.</a:t>
@@ -15013,6 +15138,7 @@
                   <a:srgbClr val="1B3B6F"/>
                 </a:solidFill>
                 <a:latin typeface="Amiri" pitchFamily="2" charset="-78"/>
+                <a:ea typeface="Amiri" pitchFamily="2" charset="-78"/>
                 <a:cs typeface="Amiri" pitchFamily="2" charset="-78"/>
               </a:rPr>
               <a:t>لَوْ لَمْ تَنْجَحْ كَمُخْرِجٍ، هَلْ سَتَنْدَمُ؟</a:t>
@@ -15222,6 +15348,7 @@
                   <a:srgbClr val="D4AF37"/>
                 </a:solidFill>
                 <a:latin typeface="Amiri" pitchFamily="2" charset="-78"/>
+                <a:ea typeface="Amiri" pitchFamily="2" charset="-78"/>
                 <a:cs typeface="Amiri" pitchFamily="2" charset="-78"/>
               </a:rPr>
               <a:t>م</a:t>
@@ -15542,6 +15669,7 @@
                   <a:srgbClr val="8A6D1E"/>
                 </a:solidFill>
                 <a:latin typeface="Amiri" pitchFamily="2" charset="-78"/>
+                <a:ea typeface="Amiri" pitchFamily="2" charset="-78"/>
                 <a:cs typeface="Amiri" pitchFamily="2" charset="-78"/>
               </a:rPr>
               <a:t>خِطَطِي</a:t>
@@ -15822,6 +15950,7 @@
                   <a:srgbClr val="1B3B6F"/>
                 </a:solidFill>
                 <a:latin typeface="Amiri" pitchFamily="2" charset="-78"/>
+                <a:ea typeface="Amiri" pitchFamily="2" charset="-78"/>
                 <a:cs typeface="Amiri" pitchFamily="2" charset="-78"/>
               </a:rPr>
               <a:t>سَأَدْرُسُ / سَأَعْمَلُ …</a:t>
@@ -15898,6 +16027,7 @@
                   <a:srgbClr val="1B3B6F"/>
                 </a:solidFill>
                 <a:latin typeface="Amiri" pitchFamily="2" charset="-78"/>
+                <a:ea typeface="Amiri" pitchFamily="2" charset="-78"/>
                 <a:cs typeface="Amiri" pitchFamily="2" charset="-78"/>
               </a:rPr>
               <a:t>مَاذَا سَتَفْعَلُ بَعْدَ المَدْرَسَةِ؟</a:t>
@@ -16066,6 +16196,7 @@
                   <a:srgbClr val="1B3B6F"/>
                 </a:solidFill>
                 <a:latin typeface="Amiri" pitchFamily="2" charset="-78"/>
+                <a:ea typeface="Amiri" pitchFamily="2" charset="-78"/>
                 <a:cs typeface="Amiri" pitchFamily="2" charset="-78"/>
               </a:rPr>
               <a:t>أَحْلُمُ بِأَنْ أَكُونَ …</a:t>
@@ -16142,6 +16273,7 @@
                   <a:srgbClr val="1B3B6F"/>
                 </a:solidFill>
                 <a:latin typeface="Amiri" pitchFamily="2" charset="-78"/>
+                <a:ea typeface="Amiri" pitchFamily="2" charset="-78"/>
                 <a:cs typeface="Amiri" pitchFamily="2" charset="-78"/>
               </a:rPr>
               <a:t>مَا الوَظِيفَةُ الَّتِي تَحْلُمُ بِهَا؟</a:t>
@@ -16310,6 +16442,7 @@
                   <a:srgbClr val="1B3B6F"/>
                 </a:solidFill>
                 <a:latin typeface="Amiri" pitchFamily="2" charset="-78"/>
+                <a:ea typeface="Amiri" pitchFamily="2" charset="-78"/>
                 <a:cs typeface="Amiri" pitchFamily="2" charset="-78"/>
               </a:rPr>
               <a:t>أُرِيدُ أَنْ أَعْمَلَ فِي …</a:t>
@@ -16386,6 +16519,7 @@
                   <a:srgbClr val="1B3B6F"/>
                 </a:solidFill>
                 <a:latin typeface="Amiri" pitchFamily="2" charset="-78"/>
+                <a:ea typeface="Amiri" pitchFamily="2" charset="-78"/>
                 <a:cs typeface="Amiri" pitchFamily="2" charset="-78"/>
               </a:rPr>
               <a:t>أَيْنَ تُرِيدُ أَنْ تَعْمَلَ؟</a:t>
@@ -16554,6 +16688,7 @@
                   <a:srgbClr val="1B3B6F"/>
                 </a:solidFill>
                 <a:latin typeface="Amiri" pitchFamily="2" charset="-78"/>
+                <a:ea typeface="Amiri" pitchFamily="2" charset="-78"/>
                 <a:cs typeface="Amiri" pitchFamily="2" charset="-78"/>
               </a:rPr>
               <a:t>نَعَمْ، سَأَدْرُسُ … / لَا، لَنْ …</a:t>
@@ -16630,6 +16765,7 @@
                   <a:srgbClr val="1B3B6F"/>
                 </a:solidFill>
                 <a:latin typeface="Amiri" pitchFamily="2" charset="-78"/>
+                <a:ea typeface="Amiri" pitchFamily="2" charset="-78"/>
                 <a:cs typeface="Amiri" pitchFamily="2" charset="-78"/>
               </a:rPr>
               <a:t>هَلْ سَتَدْرُسُ فِي الجَامِعَةِ؟</a:t>
@@ -16798,6 +16934,7 @@
                   <a:srgbClr val="1B3B6F"/>
                 </a:solidFill>
                 <a:latin typeface="Amiri" pitchFamily="2" charset="-78"/>
+                <a:ea typeface="Amiri" pitchFamily="2" charset="-78"/>
                 <a:cs typeface="Amiri" pitchFamily="2" charset="-78"/>
               </a:rPr>
               <a:t>نَعَمْ، أَتَمَنَّى أَنْ …</a:t>
@@ -16874,6 +17011,7 @@
                   <a:srgbClr val="1B3B6F"/>
                 </a:solidFill>
                 <a:latin typeface="Amiri" pitchFamily="2" charset="-78"/>
+                <a:ea typeface="Amiri" pitchFamily="2" charset="-78"/>
                 <a:cs typeface="Amiri" pitchFamily="2" charset="-78"/>
               </a:rPr>
               <a:t>هَلْ تُرِيدُ أَنْ تُسَافِرَ قَبْلَ العَمَلِ؟</a:t>
@@ -17028,6 +17166,7 @@
                   <a:srgbClr val="1B3B6F"/>
                 </a:solidFill>
                 <a:latin typeface="Amiri" pitchFamily="2" charset="-78"/>
+                <a:ea typeface="Amiri" pitchFamily="2" charset="-78"/>
                 <a:cs typeface="Amiri" pitchFamily="2" charset="-78"/>
               </a:rPr>
               <a:t>عَفْوًا، هَلْ يُمْكِنُ أَنْ تُعِيدَ السُّؤَالَ؟</a:t>
@@ -17161,6 +17300,7 @@
                   <a:srgbClr val="D4AF37"/>
                 </a:solidFill>
                 <a:latin typeface="Amiri" pitchFamily="2" charset="-78"/>
+                <a:ea typeface="Amiri" pitchFamily="2" charset="-78"/>
                 <a:cs typeface="Amiri" pitchFamily="2" charset="-78"/>
               </a:rPr>
               <a:t>م</a:t>
@@ -17481,6 +17621,7 @@
                   <a:srgbClr val="8A6D1E"/>
                 </a:solidFill>
                 <a:latin typeface="Amiri" pitchFamily="2" charset="-78"/>
+                <a:ea typeface="Amiri" pitchFamily="2" charset="-78"/>
                 <a:cs typeface="Amiri" pitchFamily="2" charset="-78"/>
               </a:rPr>
               <a:t>الطُّمُوحَاتُ وَالخِيَارَاتُ</a:t>
@@ -17761,6 +17902,7 @@
                   <a:srgbClr val="1B3B6F"/>
                 </a:solidFill>
                 <a:latin typeface="Amiri" pitchFamily="2" charset="-78"/>
+                <a:ea typeface="Amiri" pitchFamily="2" charset="-78"/>
                 <a:cs typeface="Amiri" pitchFamily="2" charset="-78"/>
               </a:rPr>
               <a:t>أَوَّلًا سَأُنْهِي … ثُمَّ سَأَدْرُسُ … وَأَخِيرًا …</a:t>
@@ -17837,6 +17979,7 @@
                   <a:srgbClr val="1B3B6F"/>
                 </a:solidFill>
                 <a:latin typeface="Amiri" pitchFamily="2" charset="-78"/>
+                <a:ea typeface="Amiri" pitchFamily="2" charset="-78"/>
                 <a:cs typeface="Amiri" pitchFamily="2" charset="-78"/>
               </a:rPr>
               <a:t>صِفْ خُطَّتَكَ لِلسَّنَوَاتِ الخَمْسِ القَادِمَةِ.</a:t>
@@ -17940,6 +18083,7 @@
                   <a:srgbClr val="1B3B6F"/>
                 </a:solidFill>
                 <a:latin typeface="Amiri" pitchFamily="2" charset="-78"/>
+                <a:ea typeface="Amiri" pitchFamily="2" charset="-78"/>
                 <a:cs typeface="Amiri" pitchFamily="2" charset="-78"/>
               </a:rPr>
               <a:t>… الَّذِي / الَّتِي …</a:t>
@@ -18016,6 +18160,7 @@
                   <a:srgbClr val="1B3B6F"/>
                 </a:solidFill>
                 <a:latin typeface="Amiri" pitchFamily="2" charset="-78"/>
+                <a:ea typeface="Amiri" pitchFamily="2" charset="-78"/>
                 <a:cs typeface="Amiri" pitchFamily="2" charset="-78"/>
               </a:rPr>
               <a:t>مَنْ أَثَّرَ فِي اخْتِيَارَاتِكَ المِهْنِيَّةِ؟</a:t>
@@ -18119,6 +18264,7 @@
                   <a:srgbClr val="1B3B6F"/>
                 </a:solidFill>
                 <a:latin typeface="Amiri" pitchFamily="2" charset="-78"/>
+                <a:ea typeface="Amiri" pitchFamily="2" charset="-78"/>
                 <a:cs typeface="Amiri" pitchFamily="2" charset="-78"/>
               </a:rPr>
               <a:t>كُنْتُ أَحْلُمُ … أَمَّا الآنَ فَأُرِيدُ …</a:t>
@@ -18195,6 +18341,7 @@
                   <a:srgbClr val="1B3B6F"/>
                 </a:solidFill>
                 <a:latin typeface="Amiri" pitchFamily="2" charset="-78"/>
+                <a:ea typeface="Amiri" pitchFamily="2" charset="-78"/>
                 <a:cs typeface="Amiri" pitchFamily="2" charset="-78"/>
               </a:rPr>
               <a:t>هَلْ تَغَيَّرَ حُلْمُكَ مُنْذُ الطُّفُولَةِ؟</a:t>
@@ -18298,6 +18445,7 @@
                   <a:srgbClr val="1B3B6F"/>
                 </a:solidFill>
                 <a:latin typeface="Amiri" pitchFamily="2" charset="-78"/>
+                <a:ea typeface="Amiri" pitchFamily="2" charset="-78"/>
                 <a:cs typeface="Amiri" pitchFamily="2" charset="-78"/>
               </a:rPr>
               <a:t>إِذَا لَمْ أُقْبَلْ …، فَسَأَدْرُسُ …</a:t>
@@ -18374,6 +18522,7 @@
                   <a:srgbClr val="1B3B6F"/>
                 </a:solidFill>
                 <a:latin typeface="Amiri" pitchFamily="2" charset="-78"/>
+                <a:ea typeface="Amiri" pitchFamily="2" charset="-78"/>
                 <a:cs typeface="Amiri" pitchFamily="2" charset="-78"/>
               </a:rPr>
               <a:t>مَا خُطَّتُكَ البَدِيلَةُ؟</a:t>
@@ -18477,6 +18626,7 @@
                   <a:srgbClr val="1B3B6F"/>
                 </a:solidFill>
                 <a:latin typeface="Amiri" pitchFamily="2" charset="-78"/>
+                <a:ea typeface="Amiri" pitchFamily="2" charset="-78"/>
                 <a:cs typeface="Amiri" pitchFamily="2" charset="-78"/>
               </a:rPr>
               <a:t>أُفَضِّلُ … لِأَنَّ … لٰكِنَّ …</a:t>
@@ -18553,6 +18703,7 @@
                   <a:srgbClr val="1B3B6F"/>
                 </a:solidFill>
                 <a:latin typeface="Amiri" pitchFamily="2" charset="-78"/>
+                <a:ea typeface="Amiri" pitchFamily="2" charset="-78"/>
                 <a:cs typeface="Amiri" pitchFamily="2" charset="-78"/>
               </a:rPr>
               <a:t>هَلْ تُفَضِّلُ أَنْ تَعْمَلَ لِنَفْسِكَ أَمْ لِشَرِكَةٍ؟</a:t>
@@ -18762,6 +18913,7 @@
                   <a:srgbClr val="D4AF37"/>
                 </a:solidFill>
                 <a:latin typeface="Amiri" pitchFamily="2" charset="-78"/>
+                <a:ea typeface="Amiri" pitchFamily="2" charset="-78"/>
                 <a:cs typeface="Amiri" pitchFamily="2" charset="-78"/>
               </a:rPr>
               <a:t>م</a:t>
@@ -19082,6 +19234,7 @@
                   <a:srgbClr val="8A6D1E"/>
                 </a:solidFill>
                 <a:latin typeface="Amiri" pitchFamily="2" charset="-78"/>
+                <a:ea typeface="Amiri" pitchFamily="2" charset="-78"/>
                 <a:cs typeface="Amiri" pitchFamily="2" charset="-78"/>
               </a:rPr>
               <a:t>المُسْتَقْبَلُ المِهْنِيُّ</a:t>
@@ -19362,6 +19515,7 @@
                   <a:srgbClr val="1B3B6F"/>
                 </a:solidFill>
                 <a:latin typeface="Amiri" pitchFamily="2" charset="-78"/>
+                <a:ea typeface="Amiri" pitchFamily="2" charset="-78"/>
                 <a:cs typeface="Amiri" pitchFamily="2" charset="-78"/>
               </a:rPr>
               <a:t>صَحِيحٌ أَنَّ … غَيْرَ أَنَّ …</a:t>
@@ -19438,6 +19592,7 @@
                   <a:srgbClr val="1B3B6F"/>
                 </a:solidFill>
                 <a:latin typeface="Amiri" pitchFamily="2" charset="-78"/>
+                <a:ea typeface="Amiri" pitchFamily="2" charset="-78"/>
                 <a:cs typeface="Amiri" pitchFamily="2" charset="-78"/>
               </a:rPr>
               <a:t>هَلْ يَجِبُ أَنْ يَخْتَارَ الشَّبَابُ مِهَنَهُمْ فِي سِنٍّ مُبَكِّرَةٍ؟</a:t>
@@ -19541,6 +19696,7 @@
                   <a:srgbClr val="1B3B6F"/>
                 </a:solidFill>
                 <a:latin typeface="Amiri" pitchFamily="2" charset="-78"/>
+                <a:ea typeface="Amiri" pitchFamily="2" charset="-78"/>
                 <a:cs typeface="Amiri" pitchFamily="2" charset="-78"/>
               </a:rPr>
               <a:t>مِنْ نَاحِيَةٍ … وَمِنْ نَاحِيَةٍ أُخْرَى …</a:t>
@@ -19617,6 +19773,7 @@
                   <a:srgbClr val="1B3B6F"/>
                 </a:solidFill>
                 <a:latin typeface="Amiri" pitchFamily="2" charset="-78"/>
+                <a:ea typeface="Amiri" pitchFamily="2" charset="-78"/>
                 <a:cs typeface="Amiri" pitchFamily="2" charset="-78"/>
               </a:rPr>
               <a:t>هَلْ يَنْبَغِي أَنْ يَخْتَارَ الأَهْلُ مِهْنَةَ أَبْنَائِهِمْ؟</a:t>
@@ -19720,6 +19877,7 @@
                   <a:srgbClr val="1B3B6F"/>
                 </a:solidFill>
                 <a:latin typeface="Amiri" pitchFamily="2" charset="-78"/>
+                <a:ea typeface="Amiri" pitchFamily="2" charset="-78"/>
                 <a:cs typeface="Amiri" pitchFamily="2" charset="-78"/>
               </a:rPr>
               <a:t>مِنَ المُتَوَقَّعِ أَنْ … مِمَّا …</a:t>
@@ -19796,6 +19954,7 @@
                   <a:srgbClr val="1B3B6F"/>
                 </a:solidFill>
                 <a:latin typeface="Amiri" pitchFamily="2" charset="-78"/>
+                <a:ea typeface="Amiri" pitchFamily="2" charset="-78"/>
                 <a:cs typeface="Amiri" pitchFamily="2" charset="-78"/>
               </a:rPr>
               <a:t>كَيْفَ سَيَكُونُ عَالَمُ العَمَلِ عِنْدَمَا تَتَخَرَّجُ؟</a:t>
@@ -19899,6 +20058,7 @@
                   <a:srgbClr val="1B3B6F"/>
                 </a:solidFill>
                 <a:latin typeface="Amiri" pitchFamily="2" charset="-78"/>
+                <a:ea typeface="Amiri" pitchFamily="2" charset="-78"/>
                 <a:cs typeface="Amiri" pitchFamily="2" charset="-78"/>
               </a:rPr>
               <a:t>أَرَى أَنَّ … لِأَنَّ …</a:t>
@@ -19975,6 +20135,7 @@
                   <a:srgbClr val="1B3B6F"/>
                 </a:solidFill>
                 <a:latin typeface="Amiri" pitchFamily="2" charset="-78"/>
+                <a:ea typeface="Amiri" pitchFamily="2" charset="-78"/>
                 <a:cs typeface="Amiri" pitchFamily="2" charset="-78"/>
               </a:rPr>
               <a:t>هَلِ المَالُ أَهَمُّ مِنَ السَّعَادَةِ فِي اخْتِيَارِ المِهْنَةِ؟</a:t>
@@ -20078,6 +20239,7 @@
                   <a:srgbClr val="1B3B6F"/>
                 </a:solidFill>
                 <a:latin typeface="Amiri" pitchFamily="2" charset="-78"/>
+                <a:ea typeface="Amiri" pitchFamily="2" charset="-78"/>
                 <a:cs typeface="Amiri" pitchFamily="2" charset="-78"/>
               </a:rPr>
               <a:t>لَوِ اسْتَطَعْتُ، لَسَأَلْتُ …</a:t>
@@ -20154,6 +20316,7 @@
                   <a:srgbClr val="1B3B6F"/>
                 </a:solidFill>
                 <a:latin typeface="Amiri" pitchFamily="2" charset="-78"/>
+                <a:ea typeface="Amiri" pitchFamily="2" charset="-78"/>
                 <a:cs typeface="Amiri" pitchFamily="2" charset="-78"/>
               </a:rPr>
               <a:t>لَوِ اسْتَطَعْتَ أَنْ تَسْأَلَ نَفْسَكَ فِي سِنِّ الأَرْبَعِينَ سُؤَالًا، مَاذَا تَسْأَلُ؟</a:t>
@@ -20363,6 +20526,7 @@
                   <a:srgbClr val="D4AF37"/>
                 </a:solidFill>
                 <a:latin typeface="Amiri" pitchFamily="2" charset="-78"/>
+                <a:ea typeface="Amiri" pitchFamily="2" charset="-78"/>
                 <a:cs typeface="Amiri" pitchFamily="2" charset="-78"/>
               </a:rPr>
               <a:t>م</a:t>
@@ -20683,6 +20847,7 @@
                   <a:srgbClr val="8A6D1E"/>
                 </a:solidFill>
                 <a:latin typeface="Amiri" pitchFamily="2" charset="-78"/>
+                <a:ea typeface="Amiri" pitchFamily="2" charset="-78"/>
                 <a:cs typeface="Amiri" pitchFamily="2" charset="-78"/>
               </a:rPr>
               <a:t>آدَابُ الصَّفِّ</a:t>
@@ -22214,6 +22379,7 @@
                   <a:srgbClr val="D4AF37"/>
                 </a:solidFill>
                 <a:latin typeface="Amiri" pitchFamily="2" charset="-78"/>
+                <a:ea typeface="Amiri" pitchFamily="2" charset="-78"/>
                 <a:cs typeface="Amiri" pitchFamily="2" charset="-78"/>
               </a:rPr>
               <a:t>م</a:t>
@@ -22534,6 +22700,7 @@
                   <a:srgbClr val="8A6D1E"/>
                 </a:solidFill>
                 <a:latin typeface="Amiri" pitchFamily="2" charset="-78"/>
+                <a:ea typeface="Amiri" pitchFamily="2" charset="-78"/>
                 <a:cs typeface="Amiri" pitchFamily="2" charset="-78"/>
               </a:rPr>
               <a:t>نَمُوذَجُ الإِجَابَةِ</a:t>
@@ -22776,6 +22943,7 @@
                   <a:srgbClr val="1B3B6F"/>
                 </a:solidFill>
                 <a:latin typeface="Amiri" pitchFamily="2" charset="-78"/>
+                <a:ea typeface="Amiri" pitchFamily="2" charset="-78"/>
                 <a:cs typeface="Amiri" pitchFamily="2" charset="-78"/>
               </a:rPr>
               <a:t>سَأَدْرُسُ فِي الجَامِعَةِ.</a:t>
@@ -22852,6 +23020,7 @@
                   <a:srgbClr val="1B3B6F"/>
                 </a:solidFill>
                 <a:latin typeface="Amiri" pitchFamily="2" charset="-78"/>
+                <a:ea typeface="Amiri" pitchFamily="2" charset="-78"/>
                 <a:cs typeface="Amiri" pitchFamily="2" charset="-78"/>
               </a:rPr>
               <a:t>مَاذَا سَتَفْعَلُ بَعْدَ المَدْرَسَةِ؟</a:t>
@@ -22955,6 +23124,7 @@
                   <a:srgbClr val="1B3B6F"/>
                 </a:solidFill>
                 <a:latin typeface="Amiri" pitchFamily="2" charset="-78"/>
+                <a:ea typeface="Amiri" pitchFamily="2" charset="-78"/>
                 <a:cs typeface="Amiri" pitchFamily="2" charset="-78"/>
               </a:rPr>
               <a:t>أَحْلُمُ بِأَنْ أَكُونَ طَيَّارًا.</a:t>
@@ -23031,6 +23201,7 @@
                   <a:srgbClr val="1B3B6F"/>
                 </a:solidFill>
                 <a:latin typeface="Amiri" pitchFamily="2" charset="-78"/>
+                <a:ea typeface="Amiri" pitchFamily="2" charset="-78"/>
                 <a:cs typeface="Amiri" pitchFamily="2" charset="-78"/>
               </a:rPr>
               <a:t>مَا الوَظِيفَةُ الَّتِي تَحْلُمُ بِهَا؟</a:t>
@@ -23134,6 +23305,7 @@
                   <a:srgbClr val="1B3B6F"/>
                 </a:solidFill>
                 <a:latin typeface="Amiri" pitchFamily="2" charset="-78"/>
+                <a:ea typeface="Amiri" pitchFamily="2" charset="-78"/>
                 <a:cs typeface="Amiri" pitchFamily="2" charset="-78"/>
               </a:rPr>
               <a:t>أُرِيدُ أَنْ أَعْمَلَ فِي الخَارِجِ.</a:t>
@@ -23210,6 +23382,7 @@
                   <a:srgbClr val="1B3B6F"/>
                 </a:solidFill>
                 <a:latin typeface="Amiri" pitchFamily="2" charset="-78"/>
+                <a:ea typeface="Amiri" pitchFamily="2" charset="-78"/>
                 <a:cs typeface="Amiri" pitchFamily="2" charset="-78"/>
               </a:rPr>
               <a:t>أَيْنَ تُرِيدُ أَنْ تَعْمَلَ؟</a:t>
@@ -23313,6 +23486,7 @@
                   <a:srgbClr val="1B3B6F"/>
                 </a:solidFill>
                 <a:latin typeface="Amiri" pitchFamily="2" charset="-78"/>
+                <a:ea typeface="Amiri" pitchFamily="2" charset="-78"/>
                 <a:cs typeface="Amiri" pitchFamily="2" charset="-78"/>
               </a:rPr>
               <a:t>نَعَمْ، سَأَدْرُسُ الطِّبَّ.</a:t>
@@ -23389,6 +23563,7 @@
                   <a:srgbClr val="1B3B6F"/>
                 </a:solidFill>
                 <a:latin typeface="Amiri" pitchFamily="2" charset="-78"/>
+                <a:ea typeface="Amiri" pitchFamily="2" charset="-78"/>
                 <a:cs typeface="Amiri" pitchFamily="2" charset="-78"/>
               </a:rPr>
               <a:t>هَلْ سَتَدْرُسُ فِي الجَامِعَةِ؟</a:t>
@@ -23492,6 +23667,7 @@
                   <a:srgbClr val="1B3B6F"/>
                 </a:solidFill>
                 <a:latin typeface="Amiri" pitchFamily="2" charset="-78"/>
+                <a:ea typeface="Amiri" pitchFamily="2" charset="-78"/>
                 <a:cs typeface="Amiri" pitchFamily="2" charset="-78"/>
               </a:rPr>
               <a:t>نَعَمْ، أَتَمَنَّى أَنْ أُسَافِرَ إِلَى اليَابَانِ.</a:t>
@@ -23568,6 +23744,7 @@
                   <a:srgbClr val="1B3B6F"/>
                 </a:solidFill>
                 <a:latin typeface="Amiri" pitchFamily="2" charset="-78"/>
+                <a:ea typeface="Amiri" pitchFamily="2" charset="-78"/>
                 <a:cs typeface="Amiri" pitchFamily="2" charset="-78"/>
               </a:rPr>
               <a:t>هَلْ تُرِيدُ أَنْ تُسَافِرَ قَبْلَ العَمَلِ؟</a:t>
@@ -23777,6 +23954,7 @@
                   <a:srgbClr val="D4AF37"/>
                 </a:solidFill>
                 <a:latin typeface="Amiri" pitchFamily="2" charset="-78"/>
+                <a:ea typeface="Amiri" pitchFamily="2" charset="-78"/>
                 <a:cs typeface="Amiri" pitchFamily="2" charset="-78"/>
               </a:rPr>
               <a:t>م</a:t>
@@ -24097,6 +24275,7 @@
                   <a:srgbClr val="8A6D1E"/>
                 </a:solidFill>
                 <a:latin typeface="Amiri" pitchFamily="2" charset="-78"/>
+                <a:ea typeface="Amiri" pitchFamily="2" charset="-78"/>
                 <a:cs typeface="Amiri" pitchFamily="2" charset="-78"/>
               </a:rPr>
               <a:t>نَمُوذَجُ الإِجَابَةِ</a:t>
@@ -24339,6 +24518,7 @@
                   <a:srgbClr val="1B3B6F"/>
                 </a:solidFill>
                 <a:latin typeface="Amiri" pitchFamily="2" charset="-78"/>
+                <a:ea typeface="Amiri" pitchFamily="2" charset="-78"/>
                 <a:cs typeface="Amiri" pitchFamily="2" charset="-78"/>
               </a:rPr>
               <a:t>أَوَّلًا سَأُنْهِي الثَّانَوِيَّةَ، ثُمَّ سَأَدْرُسُ الهَنْدَسَةَ ثَلَاثَ سَنَوَاتٍ، وَأَخِيرًا أَطْمَحُ إِلَى أَنْ أَعْمَلَ فِي شَرِكَةٍ لِلطَّاقَةِ النَّظِيفَةِ.</a:t>
@@ -24415,6 +24595,7 @@
                   <a:srgbClr val="1B3B6F"/>
                 </a:solidFill>
                 <a:latin typeface="Amiri" pitchFamily="2" charset="-78"/>
+                <a:ea typeface="Amiri" pitchFamily="2" charset="-78"/>
                 <a:cs typeface="Amiri" pitchFamily="2" charset="-78"/>
               </a:rPr>
               <a:t>صِفْ خُطَّتَكَ لِلسَّنَوَاتِ الخَمْسِ القَادِمَةِ.</a:t>
@@ -24518,6 +24699,7 @@
                   <a:srgbClr val="1B3B6F"/>
                 </a:solidFill>
                 <a:latin typeface="Amiri" pitchFamily="2" charset="-78"/>
+                <a:ea typeface="Amiri" pitchFamily="2" charset="-78"/>
                 <a:cs typeface="Amiri" pitchFamily="2" charset="-78"/>
               </a:rPr>
               <a:t>أَثَّرَتْ فِيَّ خَالَتِي الَّتِي تَعْمَلُ طَبِيبَةً فِي مُنَظَّمَةٍ إِنْسَانِيَّةٍ، فَقَدْ حَكَتْ لِي عَنْ عَمَلِهَا فِي أَفْرِيقْيَا.</a:t>
@@ -24594,6 +24776,7 @@
                   <a:srgbClr val="1B3B6F"/>
                 </a:solidFill>
                 <a:latin typeface="Amiri" pitchFamily="2" charset="-78"/>
+                <a:ea typeface="Amiri" pitchFamily="2" charset="-78"/>
                 <a:cs typeface="Amiri" pitchFamily="2" charset="-78"/>
               </a:rPr>
               <a:t>مَنْ أَثَّرَ فِي اخْتِيَارَاتِكَ المِهْنِيَّةِ؟</a:t>
@@ -24697,6 +24880,7 @@
                   <a:srgbClr val="1B3B6F"/>
                 </a:solidFill>
                 <a:latin typeface="Amiri" pitchFamily="2" charset="-78"/>
+                <a:ea typeface="Amiri" pitchFamily="2" charset="-78"/>
                 <a:cs typeface="Amiri" pitchFamily="2" charset="-78"/>
               </a:rPr>
               <a:t>كُنْتُ أَحْلُمُ بِأَنْ أَكُونَ رَائِدَ فَضَاءٍ، أَمَّا الآنَ فَأُرِيدُ أَنْ أُصَمِّمَ الصَّوَارِيخَ بَدَلًا مِنْ أَنْ أَرْكَبَهَا!</a:t>
@@ -24773,6 +24957,7 @@
                   <a:srgbClr val="1B3B6F"/>
                 </a:solidFill>
                 <a:latin typeface="Amiri" pitchFamily="2" charset="-78"/>
+                <a:ea typeface="Amiri" pitchFamily="2" charset="-78"/>
                 <a:cs typeface="Amiri" pitchFamily="2" charset="-78"/>
               </a:rPr>
               <a:t>هَلْ تَغَيَّرَ حُلْمُكَ مُنْذُ الطُّفُولَةِ؟</a:t>
@@ -24876,6 +25061,7 @@
                   <a:srgbClr val="1B3B6F"/>
                 </a:solidFill>
                 <a:latin typeface="Amiri" pitchFamily="2" charset="-78"/>
+                <a:ea typeface="Amiri" pitchFamily="2" charset="-78"/>
                 <a:cs typeface="Amiri" pitchFamily="2" charset="-78"/>
               </a:rPr>
               <a:t>إِذَا لَمْ أُقْبَلْ فِي كُلِّيَّةِ الطِّبِّ، فَسَأَدْرُسُ الصَّيْدَلَةَ، لِأَنَّهَا قَرِيبَةٌ مِنْ حُلْمِي.</a:t>
@@ -24952,6 +25138,7 @@
                   <a:srgbClr val="1B3B6F"/>
                 </a:solidFill>
                 <a:latin typeface="Amiri" pitchFamily="2" charset="-78"/>
+                <a:ea typeface="Amiri" pitchFamily="2" charset="-78"/>
                 <a:cs typeface="Amiri" pitchFamily="2" charset="-78"/>
               </a:rPr>
               <a:t>مَا خُطَّتُكَ البَدِيلَةُ؟</a:t>
@@ -25055,6 +25242,7 @@
                   <a:srgbClr val="1B3B6F"/>
                 </a:solidFill>
                 <a:latin typeface="Amiri" pitchFamily="2" charset="-78"/>
+                <a:ea typeface="Amiri" pitchFamily="2" charset="-78"/>
                 <a:cs typeface="Amiri" pitchFamily="2" charset="-78"/>
               </a:rPr>
               <a:t>أُفَضِّلُ أَنْ أُؤَسِّسَ شَرِكَتِي الخَاصَّةَ، لِأَنِّي أُحِبُّ الحُرِّيَّةَ، لٰكِنِّي سَأَعْمَلُ لِشَرِكَةٍ أَوَّلًا لِأَكْتَسِبَ الخِبْرَةَ.</a:t>
@@ -25131,6 +25319,7 @@
                   <a:srgbClr val="1B3B6F"/>
                 </a:solidFill>
                 <a:latin typeface="Amiri" pitchFamily="2" charset="-78"/>
+                <a:ea typeface="Amiri" pitchFamily="2" charset="-78"/>
                 <a:cs typeface="Amiri" pitchFamily="2" charset="-78"/>
               </a:rPr>
               <a:t>هَلْ تُفَضِّلُ أَنْ تَعْمَلَ لِنَفْسِكَ أَمْ لِشَرِكَةٍ؟</a:t>
@@ -25340,6 +25529,7 @@
                   <a:srgbClr val="D4AF37"/>
                 </a:solidFill>
                 <a:latin typeface="Amiri" pitchFamily="2" charset="-78"/>
+                <a:ea typeface="Amiri" pitchFamily="2" charset="-78"/>
                 <a:cs typeface="Amiri" pitchFamily="2" charset="-78"/>
               </a:rPr>
               <a:t>م</a:t>
@@ -25660,6 +25850,7 @@
                   <a:srgbClr val="8A6D1E"/>
                 </a:solidFill>
                 <a:latin typeface="Amiri" pitchFamily="2" charset="-78"/>
+                <a:ea typeface="Amiri" pitchFamily="2" charset="-78"/>
                 <a:cs typeface="Amiri" pitchFamily="2" charset="-78"/>
               </a:rPr>
               <a:t>نَمُوذَجُ الإِجَابَةِ</a:t>
@@ -25902,6 +26093,7 @@
                   <a:srgbClr val="1B3B6F"/>
                 </a:solidFill>
                 <a:latin typeface="Amiri" pitchFamily="2" charset="-78"/>
+                <a:ea typeface="Amiri" pitchFamily="2" charset="-78"/>
                 <a:cs typeface="Amiri" pitchFamily="2" charset="-78"/>
               </a:rPr>
               <a:t>صَحِيحٌ أَنَّ التَّخْطِيطَ المُبَكِّرَ مُفِيدٌ، غَيْرَ أَنَّ الإِنْسَانَ يَتَغَيَّرُ، وَكَثِيرٌ مِنَ النَّاجِحِينَ غَيَّرُوا مَسَارَهُمْ أَكْثَرَ مِنْ مَرَّةٍ.</a:t>
@@ -25981,6 +26173,7 @@
                   <a:srgbClr val="1B3B6F"/>
                 </a:solidFill>
                 <a:latin typeface="Amiri" pitchFamily="2" charset="-78"/>
+                <a:ea typeface="Amiri" pitchFamily="2" charset="-78"/>
                 <a:cs typeface="Amiri" pitchFamily="2" charset="-78"/>
               </a:rPr>
               <a:t>هَلْ يَجِبُ أَنْ يَخْتَارَ الشَّبَابُ مِهَنَهُمْ فِي سِنٍّ مُبَكِّرَةٍ؟</a:t>
@@ -26084,6 +26277,7 @@
                   <a:srgbClr val="1B3B6F"/>
                 </a:solidFill>
                 <a:latin typeface="Amiri" pitchFamily="2" charset="-78"/>
+                <a:ea typeface="Amiri" pitchFamily="2" charset="-78"/>
                 <a:cs typeface="Amiri" pitchFamily="2" charset="-78"/>
               </a:rPr>
               <a:t>مِنْ نَاحِيَةٍ، لَدَى الأَهْلِ خِبْرَةٌ وَنَصَائِحُ قَيِّمَةٌ، وَمِنْ نَاحِيَةٍ أُخْرَى، القَرَارُ النِّهَائِيُّ يَجِبُ أَنْ يَكُونَ لِمَنْ سَيَعِيشُ هٰذِهِ المِهْنَةَ.</a:t>
@@ -26160,6 +26354,7 @@
                   <a:srgbClr val="1B3B6F"/>
                 </a:solidFill>
                 <a:latin typeface="Amiri" pitchFamily="2" charset="-78"/>
+                <a:ea typeface="Amiri" pitchFamily="2" charset="-78"/>
                 <a:cs typeface="Amiri" pitchFamily="2" charset="-78"/>
               </a:rPr>
               <a:t>هَلْ يَنْبَغِي أَنْ يَخْتَارَ الأَهْلُ مِهْنَةَ أَبْنَائِهِمْ؟</a:t>
@@ -26263,6 +26458,7 @@
                   <a:srgbClr val="1B3B6F"/>
                 </a:solidFill>
                 <a:latin typeface="Amiri" pitchFamily="2" charset="-78"/>
+                <a:ea typeface="Amiri" pitchFamily="2" charset="-78"/>
                 <a:cs typeface="Amiri" pitchFamily="2" charset="-78"/>
               </a:rPr>
               <a:t>مِنَ المُتَوَقَّعِ أَنْ يَعْمَلَ النَّاسُ مَعَ الذَّكَاءِ الاصْطِنَاعِيِّ فِي كُلِّ مَجَالٍ، مِمَّا سَيَجْعَلُ المَهَارَاتِ الإِنْسَانِيَّةَ أَثْمَنَ مِنْ أَيِّ وَقْتٍ مَضَى.</a:t>
@@ -26339,6 +26535,7 @@
                   <a:srgbClr val="1B3B6F"/>
                 </a:solidFill>
                 <a:latin typeface="Amiri" pitchFamily="2" charset="-78"/>
+                <a:ea typeface="Amiri" pitchFamily="2" charset="-78"/>
                 <a:cs typeface="Amiri" pitchFamily="2" charset="-78"/>
               </a:rPr>
               <a:t>كَيْفَ سَيَكُونُ عَالَمُ العَمَلِ عِنْدَمَا تَتَخَرَّجُ؟</a:t>
@@ -26548,6 +26745,7 @@
                   <a:srgbClr val="D4AF37"/>
                 </a:solidFill>
                 <a:latin typeface="Amiri" pitchFamily="2" charset="-78"/>
+                <a:ea typeface="Amiri" pitchFamily="2" charset="-78"/>
                 <a:cs typeface="Amiri" pitchFamily="2" charset="-78"/>
               </a:rPr>
               <a:t>م</a:t>
@@ -26868,6 +27066,7 @@
                   <a:srgbClr val="8A6D1E"/>
                 </a:solidFill>
                 <a:latin typeface="Amiri" pitchFamily="2" charset="-78"/>
+                <a:ea typeface="Amiri" pitchFamily="2" charset="-78"/>
                 <a:cs typeface="Amiri" pitchFamily="2" charset="-78"/>
               </a:rPr>
               <a:t>نَمُوذَجُ الإِجَابَةِ</a:t>
@@ -27110,6 +27309,7 @@
                   <a:srgbClr val="1B3B6F"/>
                 </a:solidFill>
                 <a:latin typeface="Amiri" pitchFamily="2" charset="-78"/>
+                <a:ea typeface="Amiri" pitchFamily="2" charset="-78"/>
                 <a:cs typeface="Amiri" pitchFamily="2" charset="-78"/>
               </a:rPr>
               <a:t>أَرَى أَنَّ المَالَ ضَرُورِيٌّ لِحَيَاةٍ كَرِيمَةٍ، لٰكِنَّ السَّعَادَةَ هِيَ الَّتِي تَجْعَلُكَ تَسْتَيْقِظُ كُلَّ صَبَاحٍ بِحَمَاسٍ.</a:t>
@@ -27189,6 +27389,7 @@
                   <a:srgbClr val="1B3B6F"/>
                 </a:solidFill>
                 <a:latin typeface="Amiri" pitchFamily="2" charset="-78"/>
+                <a:ea typeface="Amiri" pitchFamily="2" charset="-78"/>
                 <a:cs typeface="Amiri" pitchFamily="2" charset="-78"/>
               </a:rPr>
               <a:t>هَلِ المَالُ أَهَمُّ مِنَ السَّعَادَةِ فِي اخْتِيَارِ المِهْنَةِ؟</a:t>
@@ -27292,6 +27493,7 @@
                   <a:srgbClr val="1B3B6F"/>
                 </a:solidFill>
                 <a:latin typeface="Amiri" pitchFamily="2" charset="-78"/>
+                <a:ea typeface="Amiri" pitchFamily="2" charset="-78"/>
                 <a:cs typeface="Amiri" pitchFamily="2" charset="-78"/>
               </a:rPr>
               <a:t>لَوِ اسْتَطَعْتُ، لَسَأَلْتُ: "هَلْ أَنْتَ فَخُورٌ بِمَا فَعَلْتَ؟"، لِأَنَّ هٰذَا أَهَمُّ مِنْ أَيِّ رَاتِبٍ أَوْ مَنْصِبٍ.</a:t>
@@ -27371,6 +27573,7 @@
                   <a:srgbClr val="1B3B6F"/>
                 </a:solidFill>
                 <a:latin typeface="Amiri" pitchFamily="2" charset="-78"/>
+                <a:ea typeface="Amiri" pitchFamily="2" charset="-78"/>
                 <a:cs typeface="Amiri" pitchFamily="2" charset="-78"/>
               </a:rPr>
               <a:t>لَوِ اسْتَطَعْتَ أَنْ تَسْأَلَ نَفْسَكَ فِي سِنِّ الأَرْبَعِينَ سُؤَالًا، مَاذَا تَسْأَلُ؟</a:t>
@@ -27580,6 +27783,7 @@
                   <a:srgbClr val="D4AF37"/>
                 </a:solidFill>
                 <a:latin typeface="Amiri" pitchFamily="2" charset="-78"/>
+                <a:ea typeface="Amiri" pitchFamily="2" charset="-78"/>
                 <a:cs typeface="Amiri" pitchFamily="2" charset="-78"/>
               </a:rPr>
               <a:t>م</a:t>
@@ -27900,6 +28104,7 @@
                   <a:srgbClr val="8A6D1E"/>
                 </a:solidFill>
                 <a:latin typeface="Amiri" pitchFamily="2" charset="-78"/>
+                <a:ea typeface="Amiri" pitchFamily="2" charset="-78"/>
                 <a:cs typeface="Amiri" pitchFamily="2" charset="-78"/>
               </a:rPr>
               <a:t>قَيِّمْ عَمَلَكَ</a:t>
@@ -29144,6 +29349,7 @@
                   <a:srgbClr val="FFFFFF"/>
                 </a:solidFill>
                 <a:latin typeface="Amiri" pitchFamily="2" charset="-78"/>
+                <a:ea typeface="Amiri" pitchFamily="2" charset="-78"/>
                 <a:cs typeface="Amiri" pitchFamily="2" charset="-78"/>
               </a:rPr>
               <a:t>أَحْسَنْتُمْ! إِلَى اللِّقَاءِ</a:t>
@@ -29296,6 +29502,7 @@
                   <a:srgbClr val="D4AF37"/>
                 </a:solidFill>
                 <a:latin typeface="Amiri" pitchFamily="2" charset="-78"/>
+                <a:ea typeface="Amiri" pitchFamily="2" charset="-78"/>
                 <a:cs typeface="Amiri" pitchFamily="2" charset="-78"/>
               </a:rPr>
               <a:t>وَرْشَةُ الكِتَابَةِ</a:t>
@@ -29429,6 +29636,7 @@
                   <a:srgbClr val="D4AF37"/>
                 </a:solidFill>
                 <a:latin typeface="Amiri" pitchFamily="2" charset="-78"/>
+                <a:ea typeface="Amiri" pitchFamily="2" charset="-78"/>
                 <a:cs typeface="Amiri" pitchFamily="2" charset="-78"/>
               </a:rPr>
               <a:t>م</a:t>
@@ -29749,6 +29957,7 @@
                   <a:srgbClr val="8A6D1E"/>
                 </a:solidFill>
                 <a:latin typeface="Amiri" pitchFamily="2" charset="-78"/>
+                <a:ea typeface="Amiri" pitchFamily="2" charset="-78"/>
                 <a:cs typeface="Amiri" pitchFamily="2" charset="-78"/>
               </a:rPr>
               <a:t>خَرِيطَةُ الوَرْشَةِ</a:t>
@@ -30063,6 +30272,7 @@
                   <a:srgbClr val="1B3B6F"/>
                 </a:solidFill>
                 <a:latin typeface="Amiri" pitchFamily="2" charset="-78"/>
+                <a:ea typeface="Amiri" pitchFamily="2" charset="-78"/>
                 <a:cs typeface="Amiri" pitchFamily="2" charset="-78"/>
               </a:rPr>
               <a:t>كَيْفَ</a:t>
@@ -30339,6 +30549,7 @@
                   <a:srgbClr val="1E6B52"/>
                 </a:solidFill>
                 <a:latin typeface="Amiri" pitchFamily="2" charset="-78"/>
+                <a:ea typeface="Amiri" pitchFamily="2" charset="-78"/>
                 <a:cs typeface="Amiri" pitchFamily="2" charset="-78"/>
               </a:rPr>
               <a:t>تَمْثِيلُ الدَّوْرِ</a:t>
@@ -30615,6 +30826,7 @@
                   <a:srgbClr val="8A6D1E"/>
                 </a:solidFill>
                 <a:latin typeface="Amiri" pitchFamily="2" charset="-78"/>
+                <a:ea typeface="Amiri" pitchFamily="2" charset="-78"/>
                 <a:cs typeface="Amiri" pitchFamily="2" charset="-78"/>
               </a:rPr>
               <a:t>النَّمُوذَجُ</a:t>
@@ -30891,6 +31103,7 @@
                   <a:srgbClr val="1E6B52"/>
                 </a:solidFill>
                 <a:latin typeface="Amiri" pitchFamily="2" charset="-78"/>
+                <a:ea typeface="Amiri" pitchFamily="2" charset="-78"/>
                 <a:cs typeface="Amiri" pitchFamily="2" charset="-78"/>
               </a:rPr>
               <a:t>المُحَادَثَةُ</a:t>
@@ -31167,6 +31380,7 @@
                   <a:srgbClr val="8A6D1E"/>
                 </a:solidFill>
                 <a:latin typeface="Amiri" pitchFamily="2" charset="-78"/>
+                <a:ea typeface="Amiri" pitchFamily="2" charset="-78"/>
                 <a:cs typeface="Amiri" pitchFamily="2" charset="-78"/>
               </a:rPr>
               <a:t>قَيِّمْ</a:t>
@@ -31410,6 +31624,7 @@
                   <a:srgbClr val="D4AF37"/>
                 </a:solidFill>
                 <a:latin typeface="Amiri" pitchFamily="2" charset="-78"/>
+                <a:ea typeface="Amiri" pitchFamily="2" charset="-78"/>
                 <a:cs typeface="Amiri" pitchFamily="2" charset="-78"/>
               </a:rPr>
               <a:t>م</a:t>
@@ -31730,6 +31945,7 @@
                   <a:srgbClr val="8A6D1E"/>
                 </a:solidFill>
                 <a:latin typeface="Amiri" pitchFamily="2" charset="-78"/>
+                <a:ea typeface="Amiri" pitchFamily="2" charset="-78"/>
                 <a:cs typeface="Amiri" pitchFamily="2" charset="-78"/>
               </a:rPr>
               <a:t>امْتِحَانُ التَّحَدُّثِ</a:t>
@@ -32354,6 +32570,7 @@
                   <a:srgbClr val="1B3B6F"/>
                 </a:solidFill>
                 <a:latin typeface="Amiri" pitchFamily="2" charset="-78"/>
+                <a:ea typeface="Amiri" pitchFamily="2" charset="-78"/>
                 <a:cs typeface="Amiri" pitchFamily="2" charset="-78"/>
               </a:rPr>
               <a:t>عَفْوًا، هَلْ يُمْكِنُ أَنْ تُعِيدَ السُّؤَالَ؟</a:t>
@@ -32453,6 +32670,7 @@
                   <a:srgbClr val="1B3B6F"/>
                 </a:solidFill>
                 <a:latin typeface="Amiri" pitchFamily="2" charset="-78"/>
+                <a:ea typeface="Amiri" pitchFamily="2" charset="-78"/>
                 <a:cs typeface="Amiri" pitchFamily="2" charset="-78"/>
               </a:rPr>
               <a:t>لَحْظَةً، دَعْنِي أُفَكِّرُ …</a:t>
@@ -32552,6 +32770,7 @@
                   <a:srgbClr val="1B3B6F"/>
                 </a:solidFill>
                 <a:latin typeface="Amiri" pitchFamily="2" charset="-78"/>
+                <a:ea typeface="Amiri" pitchFamily="2" charset="-78"/>
                 <a:cs typeface="Amiri" pitchFamily="2" charset="-78"/>
               </a:rPr>
               <a:t>أَقْصِدُ …</a:t>
@@ -32723,6 +32942,7 @@
                   <a:srgbClr val="D4AF37"/>
                 </a:solidFill>
                 <a:latin typeface="Amiri" pitchFamily="2" charset="-78"/>
+                <a:ea typeface="Amiri" pitchFamily="2" charset="-78"/>
                 <a:cs typeface="Amiri" pitchFamily="2" charset="-78"/>
               </a:rPr>
               <a:t>م</a:t>
@@ -33043,6 +33263,7 @@
                   <a:srgbClr val="8A6D1E"/>
                 </a:solidFill>
                 <a:latin typeface="Amiri" pitchFamily="2" charset="-78"/>
+                <a:ea typeface="Amiri" pitchFamily="2" charset="-78"/>
                 <a:cs typeface="Amiri" pitchFamily="2" charset="-78"/>
               </a:rPr>
               <a:t>المُسْتَقْبَلُ وَالأَحْلَامُ</a:t>
@@ -33346,6 +33567,7 @@
                   <a:srgbClr val="1B3B6F"/>
                 </a:solidFill>
                 <a:latin typeface="Amiri" pitchFamily="2" charset="-78"/>
+                <a:ea typeface="Amiri" pitchFamily="2" charset="-78"/>
                 <a:cs typeface="Amiri" pitchFamily="2" charset="-78"/>
               </a:rPr>
               <a:t>سَأَدْرُسُ · سَوْفَ أَدْرُسُ</a:t>
@@ -33503,6 +33725,7 @@
                   <a:srgbClr val="1B3B6F"/>
                 </a:solidFill>
                 <a:latin typeface="Amiri" pitchFamily="2" charset="-78"/>
+                <a:ea typeface="Amiri" pitchFamily="2" charset="-78"/>
                 <a:cs typeface="Amiri" pitchFamily="2" charset="-78"/>
               </a:rPr>
               <a:t>لَنْ أَدْرُسَ</a:t>
@@ -33606,6 +33829,7 @@
                   <a:srgbClr val="1B3B6F"/>
                 </a:solidFill>
                 <a:latin typeface="Amiri" pitchFamily="2" charset="-78"/>
+                <a:ea typeface="Amiri" pitchFamily="2" charset="-78"/>
                 <a:cs typeface="Amiri" pitchFamily="2" charset="-78"/>
               </a:rPr>
               <a:t>سَيَعْمَلُ</a:t>
@@ -33871,6 +34095,7 @@
                   <a:srgbClr val="1B3B6F"/>
                 </a:solidFill>
                 <a:latin typeface="Amiri" pitchFamily="2" charset="-78"/>
+                <a:ea typeface="Amiri" pitchFamily="2" charset="-78"/>
                 <a:cs typeface="Amiri" pitchFamily="2" charset="-78"/>
               </a:rPr>
               <a:t>أَطْمَحُ إِلَى …</a:t>
@@ -34028,6 +34253,7 @@
                   <a:srgbClr val="1B3B6F"/>
                 </a:solidFill>
                 <a:latin typeface="Amiri" pitchFamily="2" charset="-78"/>
+                <a:ea typeface="Amiri" pitchFamily="2" charset="-78"/>
                 <a:cs typeface="Amiri" pitchFamily="2" charset="-78"/>
               </a:rPr>
               <a:t>طَمُوحٌ · طَمُوحَةٌ</a:t>
@@ -34131,6 +34357,7 @@
                   <a:srgbClr val="1B3B6F"/>
                 </a:solidFill>
                 <a:latin typeface="Amiri" pitchFamily="2" charset="-78"/>
+                <a:ea typeface="Amiri" pitchFamily="2" charset="-78"/>
                 <a:cs typeface="Amiri" pitchFamily="2" charset="-78"/>
               </a:rPr>
               <a:t>طُمُوحٌ · طُمُوحَاتٌ</a:t>
@@ -34396,6 +34623,7 @@
                   <a:srgbClr val="1B3B6F"/>
                 </a:solidFill>
                 <a:latin typeface="Amiri" pitchFamily="2" charset="-78"/>
+                <a:ea typeface="Amiri" pitchFamily="2" charset="-78"/>
                 <a:cs typeface="Amiri" pitchFamily="2" charset="-78"/>
               </a:rPr>
               <a:t>أَتَمَنَّى أَنْ …</a:t>
@@ -34553,6 +34781,7 @@
                   <a:srgbClr val="1B3B6F"/>
                 </a:solidFill>
                 <a:latin typeface="Amiri" pitchFamily="2" charset="-78"/>
+                <a:ea typeface="Amiri" pitchFamily="2" charset="-78"/>
                 <a:cs typeface="Amiri" pitchFamily="2" charset="-78"/>
               </a:rPr>
               <a:t>حُلْمٌ · أَحْلَامٌ</a:t>
@@ -34656,6 +34885,7 @@
                   <a:srgbClr val="1B3B6F"/>
                 </a:solidFill>
                 <a:latin typeface="Amiri" pitchFamily="2" charset="-78"/>
+                <a:ea typeface="Amiri" pitchFamily="2" charset="-78"/>
                 <a:cs typeface="Amiri" pitchFamily="2" charset="-78"/>
               </a:rPr>
               <a:t>آمُلُ أَنْ</a:t>
@@ -34921,6 +35151,7 @@
                   <a:srgbClr val="1B3B6F"/>
                 </a:solidFill>
                 <a:latin typeface="Amiri" pitchFamily="2" charset="-78"/>
+                <a:ea typeface="Amiri" pitchFamily="2" charset="-78"/>
                 <a:cs typeface="Amiri" pitchFamily="2" charset="-78"/>
               </a:rPr>
               <a:t>هَدَفٌ</a:t>
@@ -35078,6 +35309,7 @@
                   <a:srgbClr val="1B3B6F"/>
                 </a:solidFill>
                 <a:latin typeface="Amiri" pitchFamily="2" charset="-78"/>
+                <a:ea typeface="Amiri" pitchFamily="2" charset="-78"/>
                 <a:cs typeface="Amiri" pitchFamily="2" charset="-78"/>
               </a:rPr>
               <a:t>أُحَقِّقُ · تَحْقِيقٌ</a:t>
@@ -35181,6 +35413,7 @@
                   <a:srgbClr val="1B3B6F"/>
                 </a:solidFill>
                 <a:latin typeface="Amiri" pitchFamily="2" charset="-78"/>
+                <a:ea typeface="Amiri" pitchFamily="2" charset="-78"/>
                 <a:cs typeface="Amiri" pitchFamily="2" charset="-78"/>
               </a:rPr>
               <a:t>أَهْدَافٌ</a:t>
@@ -35446,6 +35679,7 @@
                   <a:srgbClr val="1B3B6F"/>
                 </a:solidFill>
                 <a:latin typeface="Amiri" pitchFamily="2" charset="-78"/>
+                <a:ea typeface="Amiri" pitchFamily="2" charset="-78"/>
                 <a:cs typeface="Amiri" pitchFamily="2" charset="-78"/>
               </a:rPr>
               <a:t>خُطَّةٌ</a:t>
@@ -35603,6 +35837,7 @@
                   <a:srgbClr val="1B3B6F"/>
                 </a:solidFill>
                 <a:latin typeface="Amiri" pitchFamily="2" charset="-78"/>
+                <a:ea typeface="Amiri" pitchFamily="2" charset="-78"/>
                 <a:cs typeface="Amiri" pitchFamily="2" charset="-78"/>
               </a:rPr>
               <a:t>خُطَّةٌ بَدِيلَةٌ</a:t>
@@ -35706,6 +35941,7 @@
                   <a:srgbClr val="1B3B6F"/>
                 </a:solidFill>
                 <a:latin typeface="Amiri" pitchFamily="2" charset="-78"/>
+                <a:ea typeface="Amiri" pitchFamily="2" charset="-78"/>
                 <a:cs typeface="Amiri" pitchFamily="2" charset="-78"/>
               </a:rPr>
               <a:t>خُطَطٌ</a:t>
@@ -35971,6 +36207,7 @@
                   <a:srgbClr val="1B3B6F"/>
                 </a:solidFill>
                 <a:latin typeface="Amiri" pitchFamily="2" charset="-78"/>
+                <a:ea typeface="Amiri" pitchFamily="2" charset="-78"/>
                 <a:cs typeface="Amiri" pitchFamily="2" charset="-78"/>
               </a:rPr>
               <a:t>مُسْتَقْبَلٌ مِهْنِيٌّ</a:t>
@@ -36128,6 +36365,7 @@
                   <a:srgbClr val="1B3B6F"/>
                 </a:solidFill>
                 <a:latin typeface="Amiri" pitchFamily="2" charset="-78"/>
+                <a:ea typeface="Amiri" pitchFamily="2" charset="-78"/>
                 <a:cs typeface="Amiri" pitchFamily="2" charset="-78"/>
               </a:rPr>
               <a:t>تَرْقِيَةٌ</a:t>
@@ -36231,6 +36469,7 @@
                   <a:srgbClr val="1B3B6F"/>
                 </a:solidFill>
                 <a:latin typeface="Amiri" pitchFamily="2" charset="-78"/>
+                <a:ea typeface="Amiri" pitchFamily="2" charset="-78"/>
                 <a:cs typeface="Amiri" pitchFamily="2" charset="-78"/>
               </a:rPr>
               <a:t>مَسَارٌ مِهْنِيٌّ</a:t>
@@ -36364,6 +36603,7 @@
                   <a:srgbClr val="D4AF37"/>
                 </a:solidFill>
                 <a:latin typeface="Amiri" pitchFamily="2" charset="-78"/>
+                <a:ea typeface="Amiri" pitchFamily="2" charset="-78"/>
                 <a:cs typeface="Amiri" pitchFamily="2" charset="-78"/>
               </a:rPr>
               <a:t>م</a:t>
@@ -36684,6 +36924,7 @@
                   <a:srgbClr val="8A6D1E"/>
                 </a:solidFill>
                 <a:latin typeface="Amiri" pitchFamily="2" charset="-78"/>
+                <a:ea typeface="Amiri" pitchFamily="2" charset="-78"/>
                 <a:cs typeface="Amiri" pitchFamily="2" charset="-78"/>
               </a:rPr>
               <a:t>الخُطَّةُ وَالخُطَّةُ البَدِيلَةُ</a:t>
@@ -36987,6 +37228,7 @@
                   <a:srgbClr val="1B3B6F"/>
                 </a:solidFill>
                 <a:latin typeface="Amiri" pitchFamily="2" charset="-78"/>
+                <a:ea typeface="Amiri" pitchFamily="2" charset="-78"/>
                 <a:cs typeface="Amiri" pitchFamily="2" charset="-78"/>
               </a:rPr>
               <a:t>سَنَةُ فَرَاغٍ</a:t>
@@ -37144,6 +37386,7 @@
                   <a:srgbClr val="1B3B6F"/>
                 </a:solidFill>
                 <a:latin typeface="Amiri" pitchFamily="2" charset="-78"/>
+                <a:ea typeface="Amiri" pitchFamily="2" charset="-78"/>
                 <a:cs typeface="Amiri" pitchFamily="2" charset="-78"/>
               </a:rPr>
               <a:t>أَتَطَوَّعُ فِي الخَارِجِ</a:t>
@@ -37247,6 +37490,7 @@
                   <a:srgbClr val="1B3B6F"/>
                 </a:solidFill>
                 <a:latin typeface="Amiri" pitchFamily="2" charset="-78"/>
+                <a:ea typeface="Amiri" pitchFamily="2" charset="-78"/>
                 <a:cs typeface="Amiri" pitchFamily="2" charset="-78"/>
               </a:rPr>
               <a:t>السَّفَرُ</a:t>
@@ -37512,6 +37756,7 @@
                   <a:srgbClr val="1B3B6F"/>
                 </a:solidFill>
                 <a:latin typeface="Amiri" pitchFamily="2" charset="-78"/>
+                <a:ea typeface="Amiri" pitchFamily="2" charset="-78"/>
                 <a:cs typeface="Amiri" pitchFamily="2" charset="-78"/>
               </a:rPr>
               <a:t>أَتَخَصَّصُ فِي …</a:t>
@@ -37669,6 +37914,7 @@
                   <a:srgbClr val="1B3B6F"/>
                 </a:solidFill>
                 <a:latin typeface="Amiri" pitchFamily="2" charset="-78"/>
+                <a:ea typeface="Amiri" pitchFamily="2" charset="-78"/>
                 <a:cs typeface="Amiri" pitchFamily="2" charset="-78"/>
               </a:rPr>
               <a:t>التَّخَصُّصُ الجَامِعِيُّ</a:t>
@@ -37772,6 +38018,7 @@
                   <a:srgbClr val="1B3B6F"/>
                 </a:solidFill>
                 <a:latin typeface="Amiri" pitchFamily="2" charset="-78"/>
+                <a:ea typeface="Amiri" pitchFamily="2" charset="-78"/>
                 <a:cs typeface="Amiri" pitchFamily="2" charset="-78"/>
               </a:rPr>
               <a:t>تَخَصُّصٌ</a:t>
@@ -38037,6 +38284,7 @@
                   <a:srgbClr val="1B3B6F"/>
                 </a:solidFill>
                 <a:latin typeface="Amiri" pitchFamily="2" charset="-78"/>
+                <a:ea typeface="Amiri" pitchFamily="2" charset="-78"/>
                 <a:cs typeface="Amiri" pitchFamily="2" charset="-78"/>
               </a:rPr>
               <a:t>إِذَا … فَسَأَدْرُسُ …</a:t>
@@ -38194,6 +38442,7 @@
                   <a:srgbClr val="1B3B6F"/>
                 </a:solidFill>
                 <a:latin typeface="Amiri" pitchFamily="2" charset="-78"/>
+                <a:ea typeface="Amiri" pitchFamily="2" charset="-78"/>
                 <a:cs typeface="Amiri" pitchFamily="2" charset="-78"/>
               </a:rPr>
               <a:t>إِذَا نَجَحْتُ، فَسَأَدْرُسُ الطِّبَّ</a:t>
@@ -38297,6 +38546,7 @@
                   <a:srgbClr val="1B3B6F"/>
                 </a:solidFill>
                 <a:latin typeface="Amiri" pitchFamily="2" charset="-78"/>
+                <a:ea typeface="Amiri" pitchFamily="2" charset="-78"/>
                 <a:cs typeface="Amiri" pitchFamily="2" charset="-78"/>
               </a:rPr>
               <a:t>إِذَا لَمْ أُقْبَلْ، فَسَأَعْمَلُ</a:t>
@@ -38562,6 +38812,7 @@
                   <a:srgbClr val="1B3B6F"/>
                 </a:solidFill>
                 <a:latin typeface="Amiri" pitchFamily="2" charset="-78"/>
+                <a:ea typeface="Amiri" pitchFamily="2" charset="-78"/>
                 <a:cs typeface="Amiri" pitchFamily="2" charset="-78"/>
               </a:rPr>
               <a:t>لَوْ كُنْتُ … لَاخْتَرْتُ …</a:t>
@@ -38719,6 +38970,7 @@
                   <a:srgbClr val="1B3B6F"/>
                 </a:solidFill>
                 <a:latin typeface="Amiri" pitchFamily="2" charset="-78"/>
+                <a:ea typeface="Amiri" pitchFamily="2" charset="-78"/>
                 <a:cs typeface="Amiri" pitchFamily="2" charset="-78"/>
               </a:rPr>
               <a:t>لَسَافَرْتُ</a:t>
@@ -38822,6 +39074,7 @@
                   <a:srgbClr val="1B3B6F"/>
                 </a:solidFill>
                 <a:latin typeface="Amiri" pitchFamily="2" charset="-78"/>
+                <a:ea typeface="Amiri" pitchFamily="2" charset="-78"/>
                 <a:cs typeface="Amiri" pitchFamily="2" charset="-78"/>
               </a:rPr>
               <a:t>لَوِ اسْتَطَعْتُ</a:t>
@@ -39087,6 +39340,7 @@
                   <a:srgbClr val="1B3B6F"/>
                 </a:solidFill>
                 <a:latin typeface="Amiri" pitchFamily="2" charset="-78"/>
+                <a:ea typeface="Amiri" pitchFamily="2" charset="-78"/>
                 <a:cs typeface="Amiri" pitchFamily="2" charset="-78"/>
               </a:rPr>
               <a:t>أَسَّسَ شَرِكَةً</a:t>
@@ -39244,6 +39498,7 @@
                   <a:srgbClr val="1B3B6F"/>
                 </a:solidFill>
                 <a:latin typeface="Amiri" pitchFamily="2" charset="-78"/>
+                <a:ea typeface="Amiri" pitchFamily="2" charset="-78"/>
                 <a:cs typeface="Amiri" pitchFamily="2" charset="-78"/>
               </a:rPr>
               <a:t>رَائِدُ أَعْمَالٍ · رَائِدَةُ أَعْمَالٍ</a:t>
@@ -39347,6 +39602,7 @@
                   <a:srgbClr val="1B3B6F"/>
                 </a:solidFill>
                 <a:latin typeface="Amiri" pitchFamily="2" charset="-78"/>
+                <a:ea typeface="Amiri" pitchFamily="2" charset="-78"/>
                 <a:cs typeface="Amiri" pitchFamily="2" charset="-78"/>
               </a:rPr>
               <a:t>مَشْرُوعٌ تِجَارِيٌّ</a:t>
@@ -39612,6 +39868,7 @@
                   <a:srgbClr val="1B3B6F"/>
                 </a:solidFill>
                 <a:latin typeface="Amiri" pitchFamily="2" charset="-78"/>
+                <a:ea typeface="Amiri" pitchFamily="2" charset="-78"/>
                 <a:cs typeface="Amiri" pitchFamily="2" charset="-78"/>
               </a:rPr>
               <a:t>مُتَرَدِّدٌ</a:t>
@@ -39769,6 +40026,7 @@
                   <a:srgbClr val="1B3B6F"/>
                 </a:solidFill>
                 <a:latin typeface="Amiri" pitchFamily="2" charset="-78"/>
+                <a:ea typeface="Amiri" pitchFamily="2" charset="-78"/>
                 <a:cs typeface="Amiri" pitchFamily="2" charset="-78"/>
               </a:rPr>
               <a:t>مُتَأَكِّدٌ · مُتَأَكِّدَةٌ</a:t>
@@ -39872,6 +40130,7 @@
                   <a:srgbClr val="1B3B6F"/>
                 </a:solidFill>
                 <a:latin typeface="Amiri" pitchFamily="2" charset="-78"/>
+                <a:ea typeface="Amiri" pitchFamily="2" charset="-78"/>
                 <a:cs typeface="Amiri" pitchFamily="2" charset="-78"/>
               </a:rPr>
               <a:t>مُتَرَدِّدَةٌ</a:t>
@@ -40005,6 +40264,7 @@
                   <a:srgbClr val="D4AF37"/>
                 </a:solidFill>
                 <a:latin typeface="Amiri" pitchFamily="2" charset="-78"/>
+                <a:ea typeface="Amiri" pitchFamily="2" charset="-78"/>
                 <a:cs typeface="Amiri" pitchFamily="2" charset="-78"/>
               </a:rPr>
               <a:t>م</a:t>
@@ -40325,6 +40585,7 @@
                   <a:srgbClr val="8A6D1E"/>
                 </a:solidFill>
                 <a:latin typeface="Amiri" pitchFamily="2" charset="-78"/>
+                <a:ea typeface="Amiri" pitchFamily="2" charset="-78"/>
                 <a:cs typeface="Amiri" pitchFamily="2" charset="-78"/>
               </a:rPr>
               <a:t>فِي الغُرَفِ</a:t>
@@ -41501,6 +41762,7 @@
                   <a:srgbClr val="1B3B6F"/>
                 </a:solidFill>
                 <a:latin typeface="Amiri" pitchFamily="2" charset="-78"/>
+                <a:ea typeface="Amiri" pitchFamily="2" charset="-78"/>
                 <a:cs typeface="Amiri" pitchFamily="2" charset="-78"/>
               </a:rPr>
               <a:t>دَوْرُكَ!</a:t>
@@ -41577,6 +41839,7 @@
                   <a:srgbClr val="1B3B6F"/>
                 </a:solidFill>
                 <a:latin typeface="Amiri" pitchFamily="2" charset="-78"/>
+                <a:ea typeface="Amiri" pitchFamily="2" charset="-78"/>
                 <a:cs typeface="Amiri" pitchFamily="2" charset="-78"/>
               </a:rPr>
               <a:t>أَحْسَنْتَ! / أَحْسَنْتِ!</a:t>
@@ -41653,6 +41916,7 @@
                   <a:srgbClr val="1B3B6F"/>
                 </a:solidFill>
                 <a:latin typeface="Amiri" pitchFamily="2" charset="-78"/>
+                <a:ea typeface="Amiri" pitchFamily="2" charset="-78"/>
                 <a:cs typeface="Amiri" pitchFamily="2" charset="-78"/>
               </a:rPr>
               <a:t>تَكَلَّمْ أَكْثَرَ، مِنْ فَضْلِكَ</a:t>
@@ -41729,6 +41993,7 @@
                   <a:srgbClr val="1B3B6F"/>
                 </a:solidFill>
                 <a:latin typeface="Amiri" pitchFamily="2" charset="-78"/>
+                <a:ea typeface="Amiri" pitchFamily="2" charset="-78"/>
                 <a:cs typeface="Amiri" pitchFamily="2" charset="-78"/>
               </a:rPr>
               <a:t>لِمَاذَا؟</a:t>
@@ -41900,6 +42165,7 @@
                   <a:srgbClr val="D4AF37"/>
                 </a:solidFill>
                 <a:latin typeface="Amiri" pitchFamily="2" charset="-78"/>
+                <a:ea typeface="Amiri" pitchFamily="2" charset="-78"/>
                 <a:cs typeface="Amiri" pitchFamily="2" charset="-78"/>
               </a:rPr>
               <a:t>م</a:t>
@@ -42220,6 +42486,7 @@
                   <a:srgbClr val="8A6D1E"/>
                 </a:solidFill>
                 <a:latin typeface="Amiri" pitchFamily="2" charset="-78"/>
+                <a:ea typeface="Amiri" pitchFamily="2" charset="-78"/>
                 <a:cs typeface="Amiri" pitchFamily="2" charset="-78"/>
               </a:rPr>
               <a:t>مَاذَا سَتَفْعَلُ السَّنَةَ القَادِمَةَ؟</a:t>
@@ -42500,6 +42767,7 @@
                   <a:srgbClr val="1B3B6F"/>
                 </a:solidFill>
                 <a:latin typeface="Amiri" pitchFamily="2" charset="-78"/>
+                <a:ea typeface="Amiri" pitchFamily="2" charset="-78"/>
                 <a:cs typeface="Amiri" pitchFamily="2" charset="-78"/>
               </a:rPr>
               <a:t>سَأَدْرُسُ فِي …</a:t>
@@ -42576,6 +42844,7 @@
                   <a:srgbClr val="1B3B6F"/>
                 </a:solidFill>
                 <a:latin typeface="Amiri" pitchFamily="2" charset="-78"/>
+                <a:ea typeface="Amiri" pitchFamily="2" charset="-78"/>
                 <a:cs typeface="Amiri" pitchFamily="2" charset="-78"/>
               </a:rPr>
               <a:t>مَاذَا سَتَفْعَلُ بَعْدَ الامْتِحَانَاتِ؟</a:t>
@@ -42744,6 +43013,7 @@
                   <a:srgbClr val="1B3B6F"/>
                 </a:solidFill>
                 <a:latin typeface="Amiri" pitchFamily="2" charset="-78"/>
+                <a:ea typeface="Amiri" pitchFamily="2" charset="-78"/>
                 <a:cs typeface="Amiri" pitchFamily="2" charset="-78"/>
               </a:rPr>
               <a:t>سَأَدْرُسُ … وَ…</a:t>
@@ -42820,6 +43090,7 @@
                   <a:srgbClr val="1B3B6F"/>
                 </a:solidFill>
                 <a:latin typeface="Amiri" pitchFamily="2" charset="-78"/>
+                <a:ea typeface="Amiri" pitchFamily="2" charset="-78"/>
                 <a:cs typeface="Amiri" pitchFamily="2" charset="-78"/>
               </a:rPr>
               <a:t>أَيَّ مَوَادَّ؟</a:t>
@@ -42988,6 +43259,7 @@
                   <a:srgbClr val="1B3B6F"/>
                 </a:solidFill>
                 <a:latin typeface="Amiri" pitchFamily="2" charset="-78"/>
+                <a:ea typeface="Amiri" pitchFamily="2" charset="-78"/>
                 <a:cs typeface="Amiri" pitchFamily="2" charset="-78"/>
               </a:rPr>
               <a:t>أَتَمَنَّى أَنْ أُصْبِحَ …</a:t>
@@ -43064,6 +43336,7 @@
                   <a:srgbClr val="1B3B6F"/>
                 </a:solidFill>
                 <a:latin typeface="Amiri" pitchFamily="2" charset="-78"/>
+                <a:ea typeface="Amiri" pitchFamily="2" charset="-78"/>
                 <a:cs typeface="Amiri" pitchFamily="2" charset="-78"/>
               </a:rPr>
               <a:t>وَمَاذَا تُرِيدُ أَنْ تَعْمَلَ فِي المُسْتَقْبَلِ؟</a:t>
@@ -43232,6 +43505,7 @@
                   <a:srgbClr val="1B3B6F"/>
                 </a:solidFill>
                 <a:latin typeface="Amiri" pitchFamily="2" charset="-78"/>
+                <a:ea typeface="Amiri" pitchFamily="2" charset="-78"/>
                 <a:cs typeface="Amiri" pitchFamily="2" charset="-78"/>
               </a:rPr>
               <a:t>أَيْنَ سَيَدْرُسُ؟</a:t>
@@ -43308,6 +43582,7 @@
                   <a:srgbClr val="1B3B6F"/>
                 </a:solidFill>
                 <a:latin typeface="Amiri" pitchFamily="2" charset="-78"/>
+                <a:ea typeface="Amiri" pitchFamily="2" charset="-78"/>
                 <a:cs typeface="Amiri" pitchFamily="2" charset="-78"/>
               </a:rPr>
               <a:t>ابْنِي يُرِيدُ أَنْ يَكُونَ طَيَّارًا.</a:t>
@@ -43476,6 +43751,7 @@
                   <a:srgbClr val="1B3B6F"/>
                 </a:solidFill>
                 <a:latin typeface="Amiri" pitchFamily="2" charset="-78"/>
+                <a:ea typeface="Amiri" pitchFamily="2" charset="-78"/>
                 <a:cs typeface="Amiri" pitchFamily="2" charset="-78"/>
               </a:rPr>
               <a:t>لَا، سَأَنْتَقِلُ إِلَى … / نَعَمْ، …</a:t>
@@ -43552,6 +43828,7 @@
                   <a:srgbClr val="1B3B6F"/>
                 </a:solidFill>
                 <a:latin typeface="Amiri" pitchFamily="2" charset="-78"/>
+                <a:ea typeface="Amiri" pitchFamily="2" charset="-78"/>
                 <a:cs typeface="Amiri" pitchFamily="2" charset="-78"/>
               </a:rPr>
               <a:t>هَلْ سَتَبْقَى فِي مَدِينَتِكَ؟</a:t>
@@ -43826,6 +44103,7 @@
                   <a:srgbClr val="D4AF37"/>
                 </a:solidFill>
                 <a:latin typeface="Amiri" pitchFamily="2" charset="-78"/>
+                <a:ea typeface="Amiri" pitchFamily="2" charset="-78"/>
                 <a:cs typeface="Amiri" pitchFamily="2" charset="-78"/>
               </a:rPr>
               <a:t>م</a:t>
@@ -44146,6 +44424,7 @@
                   <a:srgbClr val="8A6D1E"/>
                 </a:solidFill>
                 <a:latin typeface="Amiri" pitchFamily="2" charset="-78"/>
+                <a:ea typeface="Amiri" pitchFamily="2" charset="-78"/>
                 <a:cs typeface="Amiri" pitchFamily="2" charset="-78"/>
               </a:rPr>
               <a:t>يَوْمٌ مَفْتُوحٌ فِي الجَامِعَةِ</a:t>
@@ -44426,6 +44705,7 @@
                   <a:srgbClr val="1B3B6F"/>
                 </a:solidFill>
                 <a:latin typeface="Amiri" pitchFamily="2" charset="-78"/>
+                <a:ea typeface="Amiri" pitchFamily="2" charset="-78"/>
                 <a:cs typeface="Amiri" pitchFamily="2" charset="-78"/>
               </a:rPr>
               <a:t>أُرِيدُ أَنْ أَتَخَصَّصَ فِي …</a:t>
@@ -44502,6 +44782,7 @@
                   <a:srgbClr val="1B3B6F"/>
                 </a:solidFill>
                 <a:latin typeface="Amiri" pitchFamily="2" charset="-78"/>
+                <a:ea typeface="Amiri" pitchFamily="2" charset="-78"/>
                 <a:cs typeface="Amiri" pitchFamily="2" charset="-78"/>
               </a:rPr>
               <a:t>أَهْلًا! مَا التَّخَصُّصُ الَّذِي يُهِمُّكَ؟</a:t>
@@ -44670,6 +44951,7 @@
                   <a:srgbClr val="1B3B6F"/>
                 </a:solidFill>
                 <a:latin typeface="Amiri" pitchFamily="2" charset="-78"/>
+                <a:ea typeface="Amiri" pitchFamily="2" charset="-78"/>
                 <a:cs typeface="Amiri" pitchFamily="2" charset="-78"/>
               </a:rPr>
               <a:t>لِأَنِّي أَطْمَحُ إِلَى أَنْ …</a:t>
@@ -44746,6 +45028,7 @@
                   <a:srgbClr val="1B3B6F"/>
                 </a:solidFill>
                 <a:latin typeface="Amiri" pitchFamily="2" charset="-78"/>
+                <a:ea typeface="Amiri" pitchFamily="2" charset="-78"/>
                 <a:cs typeface="Amiri" pitchFamily="2" charset="-78"/>
               </a:rPr>
               <a:t>لِمَاذَا؟</a:t>
@@ -44914,6 +45197,7 @@
                   <a:srgbClr val="1B3B6F"/>
                 </a:solidFill>
                 <a:latin typeface="Amiri" pitchFamily="2" charset="-78"/>
+                <a:ea typeface="Amiri" pitchFamily="2" charset="-78"/>
                 <a:cs typeface="Amiri" pitchFamily="2" charset="-78"/>
               </a:rPr>
               <a:t>هَلْ يُمْكِنُ أَنْ … ؟</a:t>
@@ -44990,6 +45274,7 @@
                   <a:srgbClr val="1B3B6F"/>
                 </a:solidFill>
                 <a:latin typeface="Amiri" pitchFamily="2" charset="-78"/>
+                <a:ea typeface="Amiri" pitchFamily="2" charset="-78"/>
                 <a:cs typeface="Amiri" pitchFamily="2" charset="-78"/>
               </a:rPr>
               <a:t>الدِّرَاسَةُ ثَلَاثُ سَنَوَاتٍ.</a:t>
@@ -45093,6 +45378,7 @@
                   <a:srgbClr val="1B3B6F"/>
                 </a:solidFill>
                 <a:latin typeface="Amiri" pitchFamily="2" charset="-78"/>
+                <a:ea typeface="Amiri" pitchFamily="2" charset="-78"/>
                 <a:cs typeface="Amiri" pitchFamily="2" charset="-78"/>
               </a:rPr>
               <a:t>إِذَا حَصَلْتُ عَلَيْهَا، فَسَأَتَقَدَّمُ …</a:t>
@@ -45169,6 +45455,7 @@
                   <a:srgbClr val="1B3B6F"/>
                 </a:solidFill>
                 <a:latin typeface="Amiri" pitchFamily="2" charset="-78"/>
+                <a:ea typeface="Amiri" pitchFamily="2" charset="-78"/>
                 <a:cs typeface="Amiri" pitchFamily="2" charset="-78"/>
               </a:rPr>
               <a:t>نَعَمْ، فِي السَّنَةِ الثَّانِيَةِ. وَمَا الدَّرَجَاتُ الَّتِي تَتَوَقَّعُهَا؟</a:t>
@@ -45272,6 +45559,7 @@
                   <a:srgbClr val="1B3B6F"/>
                 </a:solidFill>
                 <a:latin typeface="Amiri" pitchFamily="2" charset="-78"/>
+                <a:ea typeface="Amiri" pitchFamily="2" charset="-78"/>
                 <a:cs typeface="Amiri" pitchFamily="2" charset="-78"/>
               </a:rPr>
               <a:t>إِذَا لَمْ أُقْبَلْ، فَسَأَدْرُسُ …</a:t>
@@ -45348,6 +45636,7 @@
                   <a:srgbClr val="1B3B6F"/>
                 </a:solidFill>
                 <a:latin typeface="Amiri" pitchFamily="2" charset="-78"/>
+                <a:ea typeface="Amiri" pitchFamily="2" charset="-78"/>
                 <a:cs typeface="Amiri" pitchFamily="2" charset="-78"/>
               </a:rPr>
               <a:t>وَإِذَا لَمْ تُقْبَلْ؟</a:t>
@@ -45522,13 +45811,9 @@
     <a:fontScheme name="Office">
       <a:majorFont>
         <a:latin typeface="Calibri Light" panose="020F0302020204030204"/>
-        <a:ea typeface=""/>
-        <a:cs typeface=""/>
-        <a:font script="Jpan" typeface="游ゴシック Light"/>
-        <a:font script="Hang" typeface="맑은 고딕"/>
-        <a:font script="Hans" typeface="等线 Light"/>
-        <a:font script="Hant" typeface="新細明體"/>
-        <a:font script="Arab" typeface="Times New Roman"/>
+        <a:ea typeface="Amiri" pitchFamily="2" charset="-78"/>
+        <a:cs typeface="Amiri" pitchFamily="2" charset="-78"/>
+        <a:font script="Arab" typeface="Amiri"/>
         <a:font script="Hebr" typeface="Times New Roman"/>
         <a:font script="Thai" typeface="Angsana New"/>
         <a:font script="Ethi" typeface="Nyala"/>
@@ -45574,13 +45859,9 @@
       </a:majorFont>
       <a:minorFont>
         <a:latin typeface="Calibri" panose="020F0502020204030204"/>
-        <a:ea typeface=""/>
-        <a:cs typeface=""/>
-        <a:font script="Jpan" typeface="游ゴシック"/>
-        <a:font script="Hang" typeface="맑은 고딕"/>
-        <a:font script="Hans" typeface="等线"/>
-        <a:font script="Hant" typeface="新細明體"/>
-        <a:font script="Arab" typeface="Arial"/>
+        <a:ea typeface="Amiri" pitchFamily="2" charset="-78"/>
+        <a:cs typeface="Amiri" pitchFamily="2" charset="-78"/>
+        <a:font script="Arab" typeface="Amiri"/>
         <a:font script="Hebr" typeface="Arial"/>
         <a:font script="Thai" typeface="Cordia New"/>
         <a:font script="Ethi" typeface="Nyala"/>
